--- a/5.) Project Presentation/Car_Sales_Performance_Insights (1).pptx
+++ b/5.) Project Presentation/Car_Sales_Performance_Insights (1).pptx
@@ -4,16 +4,17 @@
   <p:sldMasterIdLst>
     <p:sldMasterId id="2147483648" r:id="rId1"/>
   </p:sldMasterIdLst>
+  <p:notesMasterIdLst>
+    <p:notesMasterId r:id="rId8"/>
+  </p:notesMasterIdLst>
   <p:sldIdLst>
     <p:sldId id="256" r:id="rId2"/>
     <p:sldId id="257" r:id="rId3"/>
     <p:sldId id="258" r:id="rId4"/>
     <p:sldId id="259" r:id="rId5"/>
-    <p:sldId id="260" r:id="rId6"/>
+    <p:sldId id="261" r:id="rId6"/>
+    <p:sldId id="260" r:id="rId7"/>
   </p:sldIdLst>
-  <p:notesMasterIdLst>
-    <p:notesMasterId r:id="rId7"/>
-  </p:notesMasterIdLst>
   <p:sldSz cx="12192000" cy="6858000"/>
   <p:notesSz cx="6858000" cy="12192000"/>
   <p:defaultTextStyle>
@@ -108,13 +109,20 @@
       </a:defRPr>
     </a:lvl9pPr>
   </p:defaultTextStyle>
+  <p:extLst>
+    <p:ext uri="{EFAFB233-063F-42B5-8137-9DF3F51BA10A}">
+      <p15:sldGuideLst xmlns:p15="http://schemas.microsoft.com/office/powerpoint/2012/main"/>
+    </p:ext>
+  </p:extLst>
 </p:presentation>
 </file>
 
 <file path=ppt/charts/chart1.xml><?xml version="1.0" encoding="utf-8"?>
-<c:chartSpace xmlns:c="http://schemas.openxmlformats.org/drawingml/2006/chart" xmlns:a="http://schemas.openxmlformats.org/drawingml/2006/main" xmlns:r="http://schemas.openxmlformats.org/officeDocument/2006/relationships">
+<c:chartSpace xmlns:c="http://schemas.openxmlformats.org/drawingml/2006/chart" xmlns:a="http://schemas.openxmlformats.org/drawingml/2006/main" xmlns:r="http://schemas.openxmlformats.org/officeDocument/2006/relationships" xmlns:c16r2="http://schemas.microsoft.com/office/drawing/2015/06/chart">
   <c:date1904 val="0"/>
+  <c:lang val="en-US"/>
   <c:roundedCorners val="1"/>
+  <c:style val="2"/>
   <c:chart>
     <c:title>
       <c:tx>
@@ -131,7 +139,7 @@
               </a:defRPr>
             </a:pPr>
             <a:r>
-              <a:rPr sz="1200" b="0" i="0" u="none" strike="noStrike">
+              <a:rPr lang="en-US" sz="1200" b="0" i="0" u="none" strike="noStrike">
                 <a:solidFill>
                   <a:srgbClr val="1E2761"/>
                 </a:solidFill>
@@ -142,13 +150,13 @@
           </a:p>
         </c:rich>
       </c:tx>
-      <c:layout/>
       <c:overlay val="0"/>
     </c:title>
     <c:autoTitleDeleted val="0"/>
     <c:plotArea>
       <c:layout/>
       <c:lineChart>
+        <c:grouping val="standard"/>
         <c:varyColors val="0"/>
         <c:ser>
           <c:idx val="0"/>
@@ -165,9 +173,6 @@
             </c:strRef>
           </c:tx>
           <c:spPr>
-            <a:solidFill>
-              <a:srgbClr val="1E2761"/>
-            </a:solidFill>
             <a:ln w="38100" cap="flat">
               <a:solidFill>
                 <a:srgbClr val="1E2761"/>
@@ -177,31 +182,6 @@
             </a:ln>
             <a:effectLst/>
           </c:spPr>
-          <c:invertIfNegative val="0"/>
-          <c:dLbls>
-            <c:numFmt formatCode="#,##0" sourceLinked="0"/>
-            <c:txPr>
-              <a:bodyPr/>
-              <a:lstStyle/>
-              <a:p>
-                <a:pPr>
-                  <a:defRPr b="0" i="0" strike="noStrike" sz="1200" u="none">
-                    <a:solidFill>
-                      <a:srgbClr val="000000"/>
-                    </a:solidFill>
-                    <a:latin typeface="Arial"/>
-                  </a:defRPr>
-                </a:pPr>
-              </a:p>
-            </c:txPr>
-            <c:showLegendKey val="0"/>
-            <c:showVal val="0"/>
-            <c:showCatName val="0"/>
-            <c:showSerName val="0"/>
-            <c:showPercent val="0"/>
-            <c:showBubbleSize val="0"/>
-            <c:showLeaderLines val="0"/>
-          </c:dLbls>
           <c:marker>
             <c:symbol val="circle"/>
             <c:size val="7"/>
@@ -220,53 +200,51 @@
             </c:spPr>
           </c:marker>
           <c:cat>
-            <c:multiLvlStrRef>
+            <c:strRef>
               <c:f>Sheet1!$A$2:$A$14</c:f>
-              <c:multiLvlStrCache>
+              <c:strCache>
                 <c:ptCount val="13"/>
-                <c:lvl>
-                  <c:pt idx="0">
-                    <c:v>2003</c:v>
-                  </c:pt>
-                  <c:pt idx="1">
-                    <c:v>2004</c:v>
-                  </c:pt>
-                  <c:pt idx="2">
-                    <c:v>2005</c:v>
-                  </c:pt>
-                  <c:pt idx="3">
-                    <c:v>2006</c:v>
-                  </c:pt>
-                  <c:pt idx="4">
-                    <c:v>2007</c:v>
-                  </c:pt>
-                  <c:pt idx="5">
-                    <c:v>2008</c:v>
-                  </c:pt>
-                  <c:pt idx="6">
-                    <c:v>2009</c:v>
-                  </c:pt>
-                  <c:pt idx="7">
-                    <c:v>2010</c:v>
-                  </c:pt>
-                  <c:pt idx="8">
-                    <c:v>2011</c:v>
-                  </c:pt>
-                  <c:pt idx="9">
-                    <c:v>2012</c:v>
-                  </c:pt>
-                  <c:pt idx="10">
-                    <c:v>2013</c:v>
-                  </c:pt>
-                  <c:pt idx="11">
-                    <c:v>2014</c:v>
-                  </c:pt>
-                  <c:pt idx="12">
-                    <c:v>2015</c:v>
-                  </c:pt>
-                </c:lvl>
-              </c:multiLvlStrCache>
-            </c:multiLvlStrRef>
+                <c:pt idx="0">
+                  <c:v>2003</c:v>
+                </c:pt>
+                <c:pt idx="1">
+                  <c:v>2004</c:v>
+                </c:pt>
+                <c:pt idx="2">
+                  <c:v>2005</c:v>
+                </c:pt>
+                <c:pt idx="3">
+                  <c:v>2006</c:v>
+                </c:pt>
+                <c:pt idx="4">
+                  <c:v>2007</c:v>
+                </c:pt>
+                <c:pt idx="5">
+                  <c:v>2008</c:v>
+                </c:pt>
+                <c:pt idx="6">
+                  <c:v>2009</c:v>
+                </c:pt>
+                <c:pt idx="7">
+                  <c:v>2010</c:v>
+                </c:pt>
+                <c:pt idx="8">
+                  <c:v>2011</c:v>
+                </c:pt>
+                <c:pt idx="9">
+                  <c:v>2012</c:v>
+                </c:pt>
+                <c:pt idx="10">
+                  <c:v>2013</c:v>
+                </c:pt>
+                <c:pt idx="11">
+                  <c:v>2014</c:v>
+                </c:pt>
+                <c:pt idx="12">
+                  <c:v>2015</c:v>
+                </c:pt>
+              </c:strCache>
+            </c:strRef>
           </c:cat>
           <c:val>
             <c:numRef>
@@ -317,35 +295,24 @@
             </c:numRef>
           </c:val>
           <c:smooth val="0"/>
+          <c:extLst>
+            <c:ext xmlns:c16="http://schemas.microsoft.com/office/drawing/2014/chart" uri="{C3380CC4-5D6E-409C-BE32-E72D297353CC}">
+              <c16:uniqueId val="{00000000-1E99-4AFE-853C-6D1EC06A5D5F}"/>
+            </c:ext>
+          </c:extLst>
         </c:ser>
         <c:dLbls>
-          <c:numFmt formatCode="#,##0" sourceLinked="0"/>
-          <c:txPr>
-            <a:bodyPr/>
-            <a:lstStyle/>
-            <a:p>
-              <a:pPr>
-                <a:defRPr b="0" i="0" strike="noStrike" sz="1200" u="none">
-                  <a:solidFill>
-                    <a:srgbClr val="000000"/>
-                  </a:solidFill>
-                  <a:latin typeface="Arial"/>
-                </a:defRPr>
-              </a:pPr>
-            </a:p>
-          </c:txPr>
           <c:showLegendKey val="0"/>
           <c:showVal val="0"/>
           <c:showCatName val="0"/>
           <c:showSerName val="0"/>
           <c:showPercent val="0"/>
           <c:showBubbleSize val="0"/>
-          <c:showLeaderLines val="0"/>
         </c:dLbls>
         <c:marker val="1"/>
+        <c:smooth val="0"/>
         <c:axId val="2094734554"/>
         <c:axId val="2094734552"/>
-        <c:axId val="2094734556"/>
       </c:lineChart>
       <c:catAx>
         <c:axId val="2094734554"/>
@@ -386,6 +353,7 @@
         <c:crosses val="autoZero"/>
         <c:auto val="1"/>
         <c:lblAlgn val="ctr"/>
+        <c:lblOffset val="100"/>
         <c:noMultiLvlLbl val="1"/>
       </c:catAx>
       <c:valAx>
@@ -448,6 +416,7 @@
     </c:plotArea>
     <c:plotVisOnly val="1"/>
     <c:dispBlanksAs val="span"/>
+    <c:showDLblsOverMax val="1"/>
   </c:chart>
   <c:spPr>
     <a:noFill/>
@@ -463,9 +432,11 @@
 </file>
 
 <file path=ppt/charts/chart2.xml><?xml version="1.0" encoding="utf-8"?>
-<c:chartSpace xmlns:c="http://schemas.openxmlformats.org/drawingml/2006/chart" xmlns:a="http://schemas.openxmlformats.org/drawingml/2006/main" xmlns:r="http://schemas.openxmlformats.org/officeDocument/2006/relationships">
+<c:chartSpace xmlns:c="http://schemas.openxmlformats.org/drawingml/2006/chart" xmlns:a="http://schemas.openxmlformats.org/drawingml/2006/main" xmlns:r="http://schemas.openxmlformats.org/officeDocument/2006/relationships" xmlns:c16r2="http://schemas.microsoft.com/office/drawing/2015/06/chart">
   <c:date1904 val="0"/>
+  <c:lang val="en-US"/>
   <c:roundedCorners val="1"/>
+  <c:style val="2"/>
   <c:chart>
     <c:title>
       <c:tx>
@@ -482,7 +453,7 @@
               </a:defRPr>
             </a:pPr>
             <a:r>
-              <a:rPr sz="1200" b="0" i="0" u="none" strike="noStrike">
+              <a:rPr lang="en-US" sz="1200" b="0" i="0" u="none" strike="noStrike">
                 <a:solidFill>
                   <a:srgbClr val="1E2761"/>
                 </a:solidFill>
@@ -493,7 +464,6 @@
           </a:p>
         </c:rich>
       </c:tx>
-      <c:layout/>
       <c:overlay val="0"/>
     </c:title>
     <c:autoTitleDeleted val="0"/>
@@ -526,18 +496,26 @@
           <c:invertIfNegative val="0"/>
           <c:dLbls>
             <c:numFmt formatCode="0.0&quot;%&quot;" sourceLinked="0"/>
+            <c:spPr>
+              <a:noFill/>
+              <a:ln>
+                <a:noFill/>
+              </a:ln>
+              <a:effectLst/>
+            </c:spPr>
             <c:txPr>
               <a:bodyPr/>
               <a:lstStyle/>
               <a:p>
                 <a:pPr>
-                  <a:defRPr b="0" i="0" strike="noStrike" sz="900" u="none">
+                  <a:defRPr sz="900" b="0" i="0" u="none" strike="noStrike">
                     <a:solidFill>
                       <a:srgbClr val="1E2761"/>
                     </a:solidFill>
                     <a:latin typeface="Arial"/>
                   </a:defRPr>
                 </a:pPr>
+                <a:endParaRPr lang="en-US"/>
               </a:p>
             </c:txPr>
             <c:showLegendKey val="0"/>
@@ -547,34 +525,37 @@
             <c:showPercent val="0"/>
             <c:showBubbleSize val="0"/>
             <c:showLeaderLines val="0"/>
+            <c:extLst>
+              <c:ext xmlns:c15="http://schemas.microsoft.com/office/drawing/2012/chart" uri="{CE6537A1-D6FC-4f65-9D91-7224C49458BB}">
+                <c15:showLeaderLines val="0"/>
+              </c:ext>
+            </c:extLst>
           </c:dLbls>
           <c:cat>
-            <c:multiLvlStrRef>
+            <c:strRef>
               <c:f>Sheet1!$A$2:$A$7</c:f>
-              <c:multiLvlStrCache>
+              <c:strCache>
                 <c:ptCount val="6"/>
-                <c:lvl>
-                  <c:pt idx="0">
-                    <c:v>Sedan</c:v>
-                  </c:pt>
-                  <c:pt idx="1">
-                    <c:v>SUV</c:v>
-                  </c:pt>
-                  <c:pt idx="2">
-                    <c:v>Hatchback</c:v>
-                  </c:pt>
-                  <c:pt idx="3">
-                    <c:v>Convertible</c:v>
-                  </c:pt>
-                  <c:pt idx="4">
-                    <c:v>Coupe</c:v>
-                  </c:pt>
-                  <c:pt idx="5">
-                    <c:v>Other</c:v>
-                  </c:pt>
-                </c:lvl>
-              </c:multiLvlStrCache>
-            </c:multiLvlStrRef>
+                <c:pt idx="0">
+                  <c:v>Sedan</c:v>
+                </c:pt>
+                <c:pt idx="1">
+                  <c:v>SUV</c:v>
+                </c:pt>
+                <c:pt idx="2">
+                  <c:v>Hatchback</c:v>
+                </c:pt>
+                <c:pt idx="3">
+                  <c:v>Convertible</c:v>
+                </c:pt>
+                <c:pt idx="4">
+                  <c:v>Coupe</c:v>
+                </c:pt>
+                <c:pt idx="5">
+                  <c:v>Other</c:v>
+                </c:pt>
+              </c:strCache>
+            </c:strRef>
           </c:cat>
           <c:val>
             <c:numRef>
@@ -603,36 +584,23 @@
               </c:numCache>
             </c:numRef>
           </c:val>
+          <c:extLst>
+            <c:ext xmlns:c16="http://schemas.microsoft.com/office/drawing/2014/chart" uri="{C3380CC4-5D6E-409C-BE32-E72D297353CC}">
+              <c16:uniqueId val="{00000000-5846-4524-9A3B-DFAB98696230}"/>
+            </c:ext>
+          </c:extLst>
         </c:ser>
         <c:dLbls>
-          <c:numFmt formatCode="0.0&quot;%&quot;" sourceLinked="0"/>
-          <c:txPr>
-            <a:bodyPr/>
-            <a:lstStyle/>
-            <a:p>
-              <a:pPr>
-                <a:defRPr b="0" i="0" strike="noStrike" sz="900" u="none">
-                  <a:solidFill>
-                    <a:srgbClr val="1E2761"/>
-                  </a:solidFill>
-                  <a:latin typeface="Arial"/>
-                </a:defRPr>
-              </a:pPr>
-            </a:p>
-          </c:txPr>
           <c:showLegendKey val="0"/>
           <c:showVal val="1"/>
           <c:showCatName val="0"/>
           <c:showSerName val="0"/>
           <c:showPercent val="0"/>
           <c:showBubbleSize val="0"/>
-          <c:showLeaderLines val="0"/>
         </c:dLbls>
         <c:gapWidth val="150"/>
-        <c:overlap val="0"/>
         <c:axId val="2094734554"/>
         <c:axId val="2094734552"/>
-        <c:axId val="2094734556"/>
       </c:barChart>
       <c:catAx>
         <c:axId val="2094734554"/>
@@ -673,6 +641,7 @@
         <c:crosses val="autoZero"/>
         <c:auto val="1"/>
         <c:lblAlgn val="ctr"/>
+        <c:lblOffset val="100"/>
         <c:noMultiLvlLbl val="1"/>
       </c:catAx>
       <c:valAx>
@@ -735,6 +704,7 @@
     </c:plotArea>
     <c:plotVisOnly val="1"/>
     <c:dispBlanksAs val="span"/>
+    <c:showDLblsOverMax val="1"/>
   </c:chart>
   <c:spPr>
     <a:noFill/>
@@ -750,9 +720,11 @@
 </file>
 
 <file path=ppt/charts/chart3.xml><?xml version="1.0" encoding="utf-8"?>
-<c:chartSpace xmlns:c="http://schemas.openxmlformats.org/drawingml/2006/chart" xmlns:a="http://schemas.openxmlformats.org/drawingml/2006/main" xmlns:r="http://schemas.openxmlformats.org/officeDocument/2006/relationships">
+<c:chartSpace xmlns:c="http://schemas.openxmlformats.org/drawingml/2006/chart" xmlns:a="http://schemas.openxmlformats.org/drawingml/2006/main" xmlns:r="http://schemas.openxmlformats.org/officeDocument/2006/relationships" xmlns:c16r2="http://schemas.microsoft.com/office/drawing/2015/06/chart">
   <c:date1904 val="0"/>
+  <c:lang val="en-US"/>
   <c:roundedCorners val="1"/>
+  <c:style val="2"/>
   <c:chart>
     <c:title>
       <c:tx>
@@ -769,7 +741,7 @@
               </a:defRPr>
             </a:pPr>
             <a:r>
-              <a:rPr sz="1200" b="0" i="0" u="none" strike="noStrike">
+              <a:rPr lang="en-US" sz="1200" b="0" i="0" u="none" strike="noStrike">
                 <a:solidFill>
                   <a:srgbClr val="1E2761"/>
                 </a:solidFill>
@@ -780,7 +752,6 @@
           </a:p>
         </c:rich>
       </c:tx>
-      <c:layout/>
       <c:overlay val="0"/>
     </c:title>
     <c:autoTitleDeleted val="0"/>
@@ -804,9 +775,6 @@
             </c:strRef>
           </c:tx>
           <c:spPr>
-            <a:solidFill>
-              <a:srgbClr val="028090"/>
-            </a:solidFill>
             <a:ln>
               <a:noFill/>
             </a:ln>
@@ -1028,23 +996,13 @@
             </c:numRef>
           </c:yVal>
           <c:smooth val="0"/>
+          <c:extLst>
+            <c:ext xmlns:c16="http://schemas.microsoft.com/office/drawing/2014/chart" uri="{C3380CC4-5D6E-409C-BE32-E72D297353CC}">
+              <c16:uniqueId val="{00000000-4481-4ABB-A360-FC52FAF750C1}"/>
+            </c:ext>
+          </c:extLst>
         </c:ser>
         <c:dLbls>
-          <c:numFmt formatCode="General" sourceLinked="0"/>
-          <c:txPr>
-            <a:bodyPr/>
-            <a:lstStyle/>
-            <a:p>
-              <a:pPr>
-                <a:defRPr b="0" i="0" strike="noStrike" sz="1200" u="none">
-                  <a:solidFill>
-                    <a:srgbClr val="000000"/>
-                  </a:solidFill>
-                  <a:latin typeface="Arial"/>
-                </a:defRPr>
-              </a:pPr>
-            </a:p>
-          </c:txPr>
           <c:showLegendKey val="0"/>
           <c:showVal val="0"/>
           <c:showCatName val="0"/>
@@ -1088,7 +1046,7 @@
                   </a:defRPr>
                 </a:pPr>
                 <a:r>
-                  <a:rPr sz="1000" b="0" i="0" u="none" strike="noStrike">
+                  <a:rPr lang="en-US" sz="1000" b="0" i="0" u="none" strike="noStrike">
                     <a:solidFill>
                       <a:srgbClr val="8A93B8"/>
                     </a:solidFill>
@@ -1099,7 +1057,6 @@
               </a:p>
             </c:rich>
           </c:tx>
-          <c:layout/>
           <c:overlay val="0"/>
         </c:title>
         <c:numFmt formatCode="General" sourceLinked="1"/>
@@ -1132,9 +1089,7 @@
         </c:txPr>
         <c:crossAx val="2094734552"/>
         <c:crosses val="autoZero"/>
-        <c:auto val="1"/>
-        <c:lblAlgn val="ctr"/>
-        <c:noMultiLvlLbl val="1"/>
+        <c:crossBetween val="midCat"/>
       </c:valAx>
       <c:valAx>
         <c:axId val="2094734552"/>
@@ -1169,7 +1124,7 @@
                   </a:defRPr>
                 </a:pPr>
                 <a:r>
-                  <a:rPr sz="1000" b="0" i="0" u="none" strike="noStrike">
+                  <a:rPr lang="en-US" sz="1000" b="0" i="0" u="none" strike="noStrike">
                     <a:solidFill>
                       <a:srgbClr val="8A93B8"/>
                     </a:solidFill>
@@ -1180,7 +1135,6 @@
               </a:p>
             </c:rich>
           </c:tx>
-          <c:layout/>
           <c:overlay val="0"/>
         </c:title>
         <c:numFmt formatCode="General" sourceLinked="0"/>
@@ -1241,9 +1195,11 @@
 </file>
 
 <file path=ppt/charts/chart4.xml><?xml version="1.0" encoding="utf-8"?>
-<c:chartSpace xmlns:c="http://schemas.openxmlformats.org/drawingml/2006/chart" xmlns:a="http://schemas.openxmlformats.org/drawingml/2006/main" xmlns:r="http://schemas.openxmlformats.org/officeDocument/2006/relationships">
+<c:chartSpace xmlns:c="http://schemas.openxmlformats.org/drawingml/2006/chart" xmlns:a="http://schemas.openxmlformats.org/drawingml/2006/main" xmlns:r="http://schemas.openxmlformats.org/officeDocument/2006/relationships" xmlns:c16r2="http://schemas.microsoft.com/office/drawing/2015/06/chart">
   <c:date1904 val="0"/>
+  <c:lang val="en-US"/>
   <c:roundedCorners val="1"/>
+  <c:style val="2"/>
   <c:chart>
     <c:title>
       <c:tx>
@@ -1260,7 +1216,7 @@
               </a:defRPr>
             </a:pPr>
             <a:r>
-              <a:rPr sz="1200" b="0" i="0" u="none" strike="noStrike">
+              <a:rPr lang="en-US" sz="1200" b="0" i="0" u="none" strike="noStrike">
                 <a:solidFill>
                   <a:srgbClr val="1E2761"/>
                 </a:solidFill>
@@ -1271,7 +1227,6 @@
           </a:p>
         </c:rich>
       </c:tx>
-      <c:layout/>
       <c:overlay val="0"/>
     </c:title>
     <c:autoTitleDeleted val="0"/>
@@ -1315,6 +1270,11 @@
               </a:solidFill>
               <a:effectLst/>
             </c:spPr>
+            <c:extLst>
+              <c:ext xmlns:c16="http://schemas.microsoft.com/office/drawing/2014/chart" uri="{C3380CC4-5D6E-409C-BE32-E72D297353CC}">
+                <c16:uniqueId val="{00000001-0914-465B-A3F7-6B129DE0EF02}"/>
+              </c:ext>
+            </c:extLst>
           </c:dPt>
           <c:dPt>
             <c:idx val="1"/>
@@ -1325,6 +1285,11 @@
               </a:solidFill>
               <a:effectLst/>
             </c:spPr>
+            <c:extLst>
+              <c:ext xmlns:c16="http://schemas.microsoft.com/office/drawing/2014/chart" uri="{C3380CC4-5D6E-409C-BE32-E72D297353CC}">
+                <c16:uniqueId val="{00000003-0914-465B-A3F7-6B129DE0EF02}"/>
+              </c:ext>
+            </c:extLst>
           </c:dPt>
           <c:dPt>
             <c:idx val="2"/>
@@ -1335,6 +1300,11 @@
               </a:solidFill>
               <a:effectLst/>
             </c:spPr>
+            <c:extLst>
+              <c:ext xmlns:c16="http://schemas.microsoft.com/office/drawing/2014/chart" uri="{C3380CC4-5D6E-409C-BE32-E72D297353CC}">
+                <c16:uniqueId val="{00000005-0914-465B-A3F7-6B129DE0EF02}"/>
+              </c:ext>
+            </c:extLst>
           </c:dPt>
           <c:dPt>
             <c:idx val="3"/>
@@ -1345,6 +1315,11 @@
               </a:solidFill>
               <a:effectLst/>
             </c:spPr>
+            <c:extLst>
+              <c:ext xmlns:c16="http://schemas.microsoft.com/office/drawing/2014/chart" uri="{C3380CC4-5D6E-409C-BE32-E72D297353CC}">
+                <c16:uniqueId val="{00000007-0914-465B-A3F7-6B129DE0EF02}"/>
+              </c:ext>
+            </c:extLst>
           </c:dPt>
           <c:dPt>
             <c:idx val="4"/>
@@ -1355,6 +1330,11 @@
               </a:solidFill>
               <a:effectLst/>
             </c:spPr>
+            <c:extLst>
+              <c:ext xmlns:c16="http://schemas.microsoft.com/office/drawing/2014/chart" uri="{C3380CC4-5D6E-409C-BE32-E72D297353CC}">
+                <c16:uniqueId val="{00000009-0914-465B-A3F7-6B129DE0EF02}"/>
+              </c:ext>
+            </c:extLst>
           </c:dPt>
           <c:dPt>
             <c:idx val="5"/>
@@ -1365,181 +1345,12 @@
               </a:solidFill>
               <a:effectLst/>
             </c:spPr>
+            <c:extLst>
+              <c:ext xmlns:c16="http://schemas.microsoft.com/office/drawing/2014/chart" uri="{C3380CC4-5D6E-409C-BE32-E72D297353CC}">
+                <c16:uniqueId val="{0000000B-0914-465B-A3F7-6B129DE0EF02}"/>
+              </c:ext>
+            </c:extLst>
           </c:dPt>
-          <c:dLbls>
-            <c:dLbl>
-              <c:idx val="0"/>
-              <c:numFmt formatCode="General" sourceLinked="0"/>
-              <c:spPr/>
-              <c:txPr>
-                <a:bodyPr/>
-                <a:lstStyle/>
-                <a:p>
-                  <a:pPr>
-                    <a:defRPr sz="1200" b="0" i="0" u="none" strike="noStrike">
-                      <a:solidFill>
-                        <a:srgbClr val="000000"/>
-                      </a:solidFill>
-                      <a:latin typeface="Arial"/>
-                    </a:defRPr>
-                  </a:pPr>
-                </a:p>
-              </c:txPr>
-              <c:showLegendKey val="0"/>
-              <c:showVal val="0"/>
-              <c:showCatName val="0"/>
-              <c:showSerName val="0"/>
-              <c:showPercent val="0"/>
-              <c:showBubbleSize val="0"/>
-            </c:dLbl>
-            <c:dLbl>
-              <c:idx val="1"/>
-              <c:numFmt formatCode="General" sourceLinked="0"/>
-              <c:spPr/>
-              <c:txPr>
-                <a:bodyPr/>
-                <a:lstStyle/>
-                <a:p>
-                  <a:pPr>
-                    <a:defRPr sz="1200" b="0" i="0" u="none" strike="noStrike">
-                      <a:solidFill>
-                        <a:srgbClr val="000000"/>
-                      </a:solidFill>
-                      <a:latin typeface="Arial"/>
-                    </a:defRPr>
-                  </a:pPr>
-                </a:p>
-              </c:txPr>
-              <c:showLegendKey val="0"/>
-              <c:showVal val="0"/>
-              <c:showCatName val="0"/>
-              <c:showSerName val="0"/>
-              <c:showPercent val="0"/>
-              <c:showBubbleSize val="0"/>
-            </c:dLbl>
-            <c:dLbl>
-              <c:idx val="2"/>
-              <c:numFmt formatCode="General" sourceLinked="0"/>
-              <c:spPr/>
-              <c:txPr>
-                <a:bodyPr/>
-                <a:lstStyle/>
-                <a:p>
-                  <a:pPr>
-                    <a:defRPr sz="1200" b="0" i="0" u="none" strike="noStrike">
-                      <a:solidFill>
-                        <a:srgbClr val="000000"/>
-                      </a:solidFill>
-                      <a:latin typeface="Arial"/>
-                    </a:defRPr>
-                  </a:pPr>
-                </a:p>
-              </c:txPr>
-              <c:showLegendKey val="0"/>
-              <c:showVal val="0"/>
-              <c:showCatName val="0"/>
-              <c:showSerName val="0"/>
-              <c:showPercent val="0"/>
-              <c:showBubbleSize val="0"/>
-            </c:dLbl>
-            <c:dLbl>
-              <c:idx val="3"/>
-              <c:numFmt formatCode="General" sourceLinked="0"/>
-              <c:spPr/>
-              <c:txPr>
-                <a:bodyPr/>
-                <a:lstStyle/>
-                <a:p>
-                  <a:pPr>
-                    <a:defRPr sz="1200" b="0" i="0" u="none" strike="noStrike">
-                      <a:solidFill>
-                        <a:srgbClr val="000000"/>
-                      </a:solidFill>
-                      <a:latin typeface="Arial"/>
-                    </a:defRPr>
-                  </a:pPr>
-                </a:p>
-              </c:txPr>
-              <c:showLegendKey val="0"/>
-              <c:showVal val="0"/>
-              <c:showCatName val="0"/>
-              <c:showSerName val="0"/>
-              <c:showPercent val="0"/>
-              <c:showBubbleSize val="0"/>
-            </c:dLbl>
-            <c:dLbl>
-              <c:idx val="4"/>
-              <c:numFmt formatCode="General" sourceLinked="0"/>
-              <c:spPr/>
-              <c:txPr>
-                <a:bodyPr/>
-                <a:lstStyle/>
-                <a:p>
-                  <a:pPr>
-                    <a:defRPr sz="1200" b="0" i="0" u="none" strike="noStrike">
-                      <a:solidFill>
-                        <a:srgbClr val="000000"/>
-                      </a:solidFill>
-                      <a:latin typeface="Arial"/>
-                    </a:defRPr>
-                  </a:pPr>
-                </a:p>
-              </c:txPr>
-              <c:showLegendKey val="0"/>
-              <c:showVal val="0"/>
-              <c:showCatName val="0"/>
-              <c:showSerName val="0"/>
-              <c:showPercent val="0"/>
-              <c:showBubbleSize val="0"/>
-            </c:dLbl>
-            <c:dLbl>
-              <c:idx val="5"/>
-              <c:numFmt formatCode="General" sourceLinked="0"/>
-              <c:spPr/>
-              <c:txPr>
-                <a:bodyPr/>
-                <a:lstStyle/>
-                <a:p>
-                  <a:pPr>
-                    <a:defRPr sz="1200" b="0" i="0" u="none" strike="noStrike">
-                      <a:solidFill>
-                        <a:srgbClr val="000000"/>
-                      </a:solidFill>
-                      <a:latin typeface="Arial"/>
-                    </a:defRPr>
-                  </a:pPr>
-                </a:p>
-              </c:txPr>
-              <c:showLegendKey val="0"/>
-              <c:showVal val="0"/>
-              <c:showCatName val="0"/>
-              <c:showSerName val="0"/>
-              <c:showPercent val="0"/>
-              <c:showBubbleSize val="0"/>
-            </c:dLbl>
-            <c:numFmt formatCode="General" sourceLinked="0"/>
-            <c:txPr>
-              <a:bodyPr/>
-              <a:lstStyle/>
-              <a:p>
-                <a:pPr>
-                  <a:defRPr sz="1800" b="0" i="0" u="none" strike="noStrike">
-                    <a:solidFill>
-                      <a:srgbClr val="000000"/>
-                    </a:solidFill>
-                    <a:latin typeface="Arial"/>
-                  </a:defRPr>
-                </a:pPr>
-              </a:p>
-            </c:txPr>
-            <c:showLegendKey val="0"/>
-            <c:showVal val="0"/>
-            <c:showCatName val="1"/>
-            <c:showSerName val="0"/>
-            <c:showPercent val="1"/>
-            <c:showBubbleSize val="0"/>
-            <c:showLeaderLines val="0"/>
-          </c:dLbls>
           <c:cat>
             <c:strRef>
               <c:f>Sheet1!$A$2:$A$7</c:f>
@@ -1570,6 +1381,7 @@
             <c:numRef>
               <c:f>Sheet1!$B$2:$B$7</c:f>
               <c:numCache>
+                <c:formatCode>General</c:formatCode>
                 <c:ptCount val="6"/>
                 <c:pt idx="0">
                   <c:v>22</c:v>
@@ -1592,7 +1404,21 @@
               </c:numCache>
             </c:numRef>
           </c:val>
+          <c:extLst>
+            <c:ext xmlns:c16="http://schemas.microsoft.com/office/drawing/2014/chart" uri="{C3380CC4-5D6E-409C-BE32-E72D297353CC}">
+              <c16:uniqueId val="{0000000C-0914-465B-A3F7-6B129DE0EF02}"/>
+            </c:ext>
+          </c:extLst>
         </c:ser>
+        <c:dLbls>
+          <c:showLegendKey val="0"/>
+          <c:showVal val="0"/>
+          <c:showCatName val="0"/>
+          <c:showSerName val="0"/>
+          <c:showPercent val="0"/>
+          <c:showBubbleSize val="0"/>
+          <c:showLeaderLines val="0"/>
+        </c:dLbls>
         <c:firstSliceAng val="0"/>
         <c:holeSize val="55"/>
       </c:doughnutChart>
@@ -1626,6 +1452,7 @@
     </c:legend>
     <c:plotVisOnly val="1"/>
     <c:dispBlanksAs val="span"/>
+    <c:showDLblsOverMax val="1"/>
   </c:chart>
   <c:spPr>
     <a:noFill/>
@@ -1662,234 +1489,10 @@
           <a:chExt cx="0" cy="0"/>
         </a:xfrm>
       </p:grpSpPr>
-      <p:sp>
-        <p:nvSpPr>
-          <p:cNvPr id="2" name="Header Placeholder 1"/>
-          <p:cNvSpPr>
-            <a:spLocks noGrp="1"/>
-          </p:cNvSpPr>
-          <p:nvPr>
-            <p:ph type="hdr" sz="quarter"/>
-          </p:nvPr>
-        </p:nvSpPr>
-        <p:spPr>
-          <a:xfrm>
-            <a:off x="0" y="0"/>
-            <a:ext cx="2971800" cy="458788"/>
-          </a:xfrm>
-          <a:prstGeom prst="rect">
-            <a:avLst/>
-          </a:prstGeom>
-        </p:spPr>
-        <p:txBody>
-          <a:bodyPr vert="horz" lIns="91440" tIns="45720" rIns="91440" bIns="45720" rtlCol="0"/>
-          <a:lstStyle>
-            <a:lvl1pPr algn="l">
-              <a:defRPr sz="1200"/>
-            </a:lvl1pPr>
-          </a:lstStyle>
-          <a:p>
-            <a:endParaRPr lang="en-US"/>
-          </a:p>
-        </p:txBody>
-      </p:sp>
-      <p:sp>
-        <p:nvSpPr>
-          <p:cNvPr id="3" name="Date Placeholder 2"/>
-          <p:cNvSpPr>
-            <a:spLocks noGrp="1"/>
-          </p:cNvSpPr>
-          <p:nvPr>
-            <p:ph type="dt" idx="1"/>
-          </p:nvPr>
-        </p:nvSpPr>
-        <p:spPr>
-          <a:xfrm>
-            <a:off x="3884613" y="0"/>
-            <a:ext cx="2971800" cy="458788"/>
-          </a:xfrm>
-          <a:prstGeom prst="rect">
-            <a:avLst/>
-          </a:prstGeom>
-        </p:spPr>
-        <p:txBody>
-          <a:bodyPr vert="horz" lIns="91440" tIns="45720" rIns="91440" bIns="45720" rtlCol="0"/>
-          <a:lstStyle>
-            <a:lvl1pPr algn="r">
-              <a:defRPr sz="1200"/>
-            </a:lvl1pPr>
-          </a:lstStyle>
-          <a:p>
-            <a:fld id="{5282F153-3F37-0F45-9E97-73ACFA13230C}" type="datetimeFigureOut">
-              <a:rPr lang="en-US"/>
-              <a:t>7/23/19</a:t>
-            </a:fld>
-            <a:endParaRPr lang="en-US"/>
-          </a:p>
-        </p:txBody>
-      </p:sp>
-      <p:sp>
-        <p:nvSpPr>
-          <p:cNvPr id="4" name="Slide Image Placeholder 3"/>
-          <p:cNvSpPr>
-            <a:spLocks noGrp="1" noRot="1" noChangeAspect="1"/>
-          </p:cNvSpPr>
-          <p:nvPr>
-            <p:ph type="sldImg" idx="2"/>
-          </p:nvPr>
-        </p:nvSpPr>
-        <p:spPr>
-          <a:xfrm>
-            <a:off x="685800" y="1143000"/>
-            <a:ext cx="5486400" cy="3086100"/>
-          </a:xfrm>
-          <a:prstGeom prst="rect">
-            <a:avLst/>
-          </a:prstGeom>
-          <a:noFill/>
-          <a:ln w="12700">
-            <a:solidFill>
-              <a:prstClr val="black"/>
-            </a:solidFill>
-          </a:ln>
-        </p:spPr>
-        <p:txBody>
-          <a:bodyPr vert="horz" lIns="91440" tIns="45720" rIns="91440" bIns="45720" rtlCol="0" anchor="ctr"/>
-          <a:lstStyle/>
-          <a:p>
-            <a:endParaRPr lang="en-US"/>
-          </a:p>
-        </p:txBody>
-      </p:sp>
-      <p:sp>
-        <p:nvSpPr>
-          <p:cNvPr id="5" name="Notes Placeholder 4"/>
-          <p:cNvSpPr>
-            <a:spLocks noGrp="1"/>
-          </p:cNvSpPr>
-          <p:nvPr>
-            <p:ph type="body" sz="quarter" idx="3"/>
-          </p:nvPr>
-        </p:nvSpPr>
-        <p:spPr>
-          <a:xfrm>
-            <a:off x="685800" y="4400550"/>
-            <a:ext cx="5486400" cy="3600450"/>
-          </a:xfrm>
-          <a:prstGeom prst="rect">
-            <a:avLst/>
-          </a:prstGeom>
-        </p:spPr>
-        <p:txBody>
-          <a:bodyPr vert="horz" lIns="91440" tIns="45720" rIns="91440" bIns="45720" rtlCol="0"/>
-          <a:lstStyle/>
-          <a:p>
-            <a:pPr lvl="0"/>
-            <a:r>
-              <a:rPr lang="en-US"/>
-              <a:t>Click to edit Master text styles</a:t>
-            </a:r>
-          </a:p>
-          <a:p>
-            <a:pPr lvl="1"/>
-            <a:r>
-              <a:rPr lang="en-US"/>
-              <a:t>Second level</a:t>
-            </a:r>
-          </a:p>
-          <a:p>
-            <a:pPr lvl="2"/>
-            <a:r>
-              <a:rPr lang="en-US"/>
-              <a:t>Third level</a:t>
-            </a:r>
-          </a:p>
-          <a:p>
-            <a:pPr lvl="3"/>
-            <a:r>
-              <a:rPr lang="en-US"/>
-              <a:t>Fourth level</a:t>
-            </a:r>
-          </a:p>
-          <a:p>
-            <a:pPr lvl="4"/>
-            <a:r>
-              <a:rPr lang="en-US"/>
-              <a:t>Fifth level</a:t>
-            </a:r>
-          </a:p>
-        </p:txBody>
-      </p:sp>
-      <p:sp>
-        <p:nvSpPr>
-          <p:cNvPr id="6" name="Footer Placeholder 5"/>
-          <p:cNvSpPr>
-            <a:spLocks noGrp="1"/>
-          </p:cNvSpPr>
-          <p:nvPr>
-            <p:ph type="ftr" sz="quarter" idx="4"/>
-          </p:nvPr>
-        </p:nvSpPr>
-        <p:spPr>
-          <a:xfrm>
-            <a:off x="0" y="8685213"/>
-            <a:ext cx="2971800" cy="458787"/>
-          </a:xfrm>
-          <a:prstGeom prst="rect">
-            <a:avLst/>
-          </a:prstGeom>
-        </p:spPr>
-        <p:txBody>
-          <a:bodyPr vert="horz" lIns="91440" tIns="45720" rIns="91440" bIns="45720" rtlCol="0" anchor="b"/>
-          <a:lstStyle>
-            <a:lvl1pPr algn="l">
-              <a:defRPr sz="1200"/>
-            </a:lvl1pPr>
-          </a:lstStyle>
-          <a:p>
-            <a:endParaRPr lang="en-US"/>
-          </a:p>
-        </p:txBody>
-      </p:sp>
-      <p:sp>
-        <p:nvSpPr>
-          <p:cNvPr id="7" name="Slide Number Placeholder 6"/>
-          <p:cNvSpPr>
-            <a:spLocks noGrp="1"/>
-          </p:cNvSpPr>
-          <p:nvPr>
-            <p:ph type="sldNum" sz="quarter" idx="5"/>
-          </p:nvPr>
-        </p:nvSpPr>
-        <p:spPr>
-          <a:xfrm>
-            <a:off x="3884613" y="8685213"/>
-            <a:ext cx="2971800" cy="458787"/>
-          </a:xfrm>
-          <a:prstGeom prst="rect">
-            <a:avLst/>
-          </a:prstGeom>
-        </p:spPr>
-        <p:txBody>
-          <a:bodyPr vert="horz" lIns="91440" tIns="45720" rIns="91440" bIns="45720" rtlCol="0" anchor="b"/>
-          <a:lstStyle>
-            <a:lvl1pPr algn="r">
-              <a:defRPr sz="1200"/>
-            </a:lvl1pPr>
-          </a:lstStyle>
-          <a:p>
-            <a:fld id="{CE5E9CC1-C706-0F49-92D6-E571CC5EEA8F}" type="slidenum">
-              <a:rPr lang="en-US"/>
-              <a:t>‹#›</a:t>
-            </a:fld>
-            <a:endParaRPr lang="en-US"/>
-          </a:p>
-        </p:txBody>
-      </p:sp>
     </p:spTree>
     <p:extLst>
       <p:ext uri="{BB962C8B-B14F-4D97-AF65-F5344CB8AC3E}">
-        <p14:creationId xmlns:p14="http://schemas.microsoft.com/office/powerpoint/2010/main" val="1024086991"/>
+        <p14:creationId xmlns:p14="http://schemas.microsoft.com/office/powerpoint/2010/main" val="2187306004"/>
       </p:ext>
     </p:extLst>
   </p:cSld>
@@ -2033,10 +1636,6 @@
           <a:bodyPr/>
           <a:lstStyle/>
           <a:p>
-            <a:r>
-              <a:rPr lang="en-US" dirty="0"/>
-              <a:t/>
-            </a:r>
             <a:endParaRPr lang="en-US" dirty="0"/>
           </a:p>
         </p:txBody>
@@ -2121,10 +1720,6 @@
           <a:bodyPr/>
           <a:lstStyle/>
           <a:p>
-            <a:r>
-              <a:rPr lang="en-US" dirty="0"/>
-              <a:t/>
-            </a:r>
             <a:endParaRPr lang="en-US" dirty="0"/>
           </a:p>
         </p:txBody>
@@ -2209,10 +1804,6 @@
           <a:bodyPr/>
           <a:lstStyle/>
           <a:p>
-            <a:r>
-              <a:rPr lang="en-US" dirty="0"/>
-              <a:t/>
-            </a:r>
             <a:endParaRPr lang="en-US" dirty="0"/>
           </a:p>
         </p:txBody>
@@ -2297,10 +1888,6 @@
           <a:bodyPr/>
           <a:lstStyle/>
           <a:p>
-            <a:r>
-              <a:rPr lang="en-US" dirty="0"/>
-              <a:t/>
-            </a:r>
             <a:endParaRPr lang="en-US" dirty="0"/>
           </a:p>
         </p:txBody>
@@ -2385,10 +1972,6 @@
           <a:bodyPr/>
           <a:lstStyle/>
           <a:p>
-            <a:r>
-              <a:rPr lang="en-US" dirty="0"/>
-              <a:t/>
-            </a:r>
             <a:endParaRPr lang="en-US" dirty="0"/>
           </a:p>
         </p:txBody>
@@ -2410,7 +1993,7 @@
           <a:p>
             <a:fld id="{F7021451-1387-4CA6-816F-3879F97B5CBC}" type="slidenum">
               <a:rPr lang="en-US"/>
-              <a:t>5</a:t>
+              <a:t>6</a:t>
             </a:fld>
             <a:endParaRPr lang="en-US"/>
           </a:p>
@@ -2462,6 +2045,11 @@
 <file path=ppt/slideMasters/slideMaster1.xml><?xml version="1.0" encoding="utf-8"?>
 <p:sldMaster xmlns:a="http://schemas.openxmlformats.org/drawingml/2006/main" xmlns:r="http://schemas.openxmlformats.org/officeDocument/2006/relationships" xmlns:p="http://schemas.openxmlformats.org/presentationml/2006/main">
   <p:cSld>
+    <p:bg>
+      <p:bgRef idx="1001">
+        <a:schemeClr val="bg1"/>
+      </p:bgRef>
+    </p:bg>
     <p:spTree>
       <p:nvGrpSpPr>
         <p:cNvPr id="1" name=""/>
@@ -2744,6 +2332,7 @@
         <a:solidFill>
           <a:srgbClr val="1E2761"/>
         </a:solidFill>
+        <a:effectLst/>
       </p:bgPr>
     </p:bg>
     <p:spTree>
@@ -2779,6 +2368,13 @@
           </a:solidFill>
           <a:ln/>
         </p:spPr>
+        <p:txBody>
+          <a:bodyPr/>
+          <a:lstStyle/>
+          <a:p>
+            <a:endParaRPr lang="en-US"/>
+          </a:p>
+        </p:txBody>
       </p:sp>
       <p:sp>
         <p:nvSpPr>
@@ -2801,11 +2397,11 @@
           <a:bodyPr wrap="square" rtlCol="0" anchor="ctr"/>
           <a:lstStyle/>
           <a:p>
-            <a:pPr indent="0" marL="0">
-              <a:buNone/>
-            </a:pPr>
-            <a:r>
-              <a:rPr lang="en-US" sz="1200" b="1" spc="400" kern="0" dirty="0">
+            <a:pPr marL="0" indent="0">
+              <a:buNone/>
+            </a:pPr>
+            <a:r>
+              <a:rPr lang="en-US" sz="1200" b="1" kern="0" spc="400" dirty="0">
                 <a:solidFill>
                   <a:srgbClr val="F2B340"/>
                 </a:solidFill>
@@ -2840,7 +2436,7 @@
           <a:bodyPr wrap="square" rtlCol="0" anchor="ctr"/>
           <a:lstStyle/>
           <a:p>
-            <a:pPr indent="0" marL="0">
+            <a:pPr marL="0" indent="0">
               <a:lnSpc>
                 <a:spcPct val="100000"/>
               </a:lnSpc>
@@ -2860,7 +2456,7 @@
             <a:endParaRPr lang="en-US" sz="6000" dirty="0"/>
           </a:p>
           <a:p>
-            <a:pPr indent="0" marL="0">
+            <a:pPr marL="0" indent="0">
               <a:lnSpc>
                 <a:spcPct val="100000"/>
               </a:lnSpc>
@@ -2905,6 +2501,13 @@
             <a:prstDash val="solid"/>
           </a:ln>
         </p:spPr>
+        <p:txBody>
+          <a:bodyPr/>
+          <a:lstStyle/>
+          <a:p>
+            <a:endParaRPr lang="en-US"/>
+          </a:p>
+        </p:txBody>
       </p:sp>
       <p:sp>
         <p:nvSpPr>
@@ -2927,7 +2530,7 @@
           <a:bodyPr wrap="square" rtlCol="0" anchor="ctr"/>
           <a:lstStyle/>
           <a:p>
-            <a:pPr indent="0" marL="0">
+            <a:pPr marL="0" indent="0">
               <a:buNone/>
             </a:pPr>
             <a:r>
@@ -2966,11 +2569,11 @@
           <a:bodyPr wrap="square" rtlCol="0" anchor="ctr"/>
           <a:lstStyle/>
           <a:p>
-            <a:pPr indent="0" marL="0">
-              <a:buNone/>
-            </a:pPr>
-            <a:r>
-              <a:rPr lang="en-US" sz="900" b="1" spc="300" kern="0" dirty="0">
+            <a:pPr marL="0" indent="0">
+              <a:buNone/>
+            </a:pPr>
+            <a:r>
+              <a:rPr lang="en-US" sz="900" b="1" kern="0" spc="300" dirty="0">
                 <a:solidFill>
                   <a:srgbClr val="F2B340"/>
                 </a:solidFill>
@@ -3005,7 +2608,7 @@
           <a:bodyPr wrap="square" rtlCol="0" anchor="ctr"/>
           <a:lstStyle/>
           <a:p>
-            <a:pPr indent="0" marL="0">
+            <a:pPr marL="0" indent="0">
               <a:buNone/>
             </a:pPr>
             <a:r>
@@ -3022,7 +2625,7 @@
             <a:endParaRPr lang="en-US" sz="1100" dirty="0"/>
           </a:p>
           <a:p>
-            <a:pPr indent="0" marL="0">
+            <a:pPr marL="0" indent="0">
               <a:buNone/>
             </a:pPr>
             <a:r>
@@ -3061,11 +2664,11 @@
           <a:bodyPr wrap="square" rtlCol="0" anchor="ctr"/>
           <a:lstStyle/>
           <a:p>
-            <a:pPr indent="0" marL="0">
-              <a:buNone/>
-            </a:pPr>
-            <a:r>
-              <a:rPr lang="en-US" sz="900" b="1" spc="300" kern="0" dirty="0">
+            <a:pPr marL="0" indent="0">
+              <a:buNone/>
+            </a:pPr>
+            <a:r>
+              <a:rPr lang="en-US" sz="900" b="1" kern="0" spc="300" dirty="0">
                 <a:solidFill>
                   <a:srgbClr val="F2B340"/>
                 </a:solidFill>
@@ -3100,7 +2703,7 @@
           <a:bodyPr wrap="square" rtlCol="0" anchor="ctr"/>
           <a:lstStyle/>
           <a:p>
-            <a:pPr indent="0" marL="0">
+            <a:pPr marL="0" indent="0">
               <a:buNone/>
             </a:pPr>
             <a:r>
@@ -3139,11 +2742,11 @@
           <a:bodyPr wrap="square" rtlCol="0" anchor="ctr"/>
           <a:lstStyle/>
           <a:p>
-            <a:pPr indent="0" marL="0">
-              <a:buNone/>
-            </a:pPr>
-            <a:r>
-              <a:rPr lang="en-US" sz="900" b="1" spc="300" kern="0" dirty="0">
+            <a:pPr marL="0" indent="0">
+              <a:buNone/>
+            </a:pPr>
+            <a:r>
+              <a:rPr lang="en-US" sz="900" b="1" kern="0" spc="300" dirty="0">
                 <a:solidFill>
                   <a:srgbClr val="F2B340"/>
                 </a:solidFill>
@@ -3178,7 +2781,7 @@
           <a:bodyPr wrap="square" rtlCol="0" anchor="ctr"/>
           <a:lstStyle/>
           <a:p>
-            <a:pPr indent="0" marL="0">
+            <a:pPr marL="0" indent="0">
               <a:buNone/>
             </a:pPr>
             <a:r>
@@ -3212,6 +2815,7 @@
         <a:solidFill>
           <a:srgbClr val="FFFFFF"/>
         </a:solidFill>
+        <a:effectLst/>
       </p:bgPr>
     </p:bg>
     <p:spTree>
@@ -3249,11 +2853,11 @@
           <a:bodyPr wrap="square" rtlCol="0" anchor="ctr"/>
           <a:lstStyle/>
           <a:p>
-            <a:pPr indent="0" marL="0">
-              <a:buNone/>
-            </a:pPr>
-            <a:r>
-              <a:rPr lang="en-US" sz="1000" b="1" spc="400" kern="0" dirty="0">
+            <a:pPr marL="0" indent="0">
+              <a:buNone/>
+            </a:pPr>
+            <a:r>
+              <a:rPr lang="en-US" sz="1000" b="1" kern="0" spc="400" dirty="0">
                 <a:solidFill>
                   <a:srgbClr val="F2B340"/>
                 </a:solidFill>
@@ -3288,7 +2892,7 @@
           <a:bodyPr wrap="square" rtlCol="0" anchor="ctr"/>
           <a:lstStyle/>
           <a:p>
-            <a:pPr indent="0" marL="0">
+            <a:pPr marL="0" indent="0">
               <a:buNone/>
             </a:pPr>
             <a:r>
@@ -3330,6 +2934,13 @@
             <a:prstDash val="solid"/>
           </a:ln>
         </p:spPr>
+        <p:txBody>
+          <a:bodyPr/>
+          <a:lstStyle/>
+          <a:p>
+            <a:endParaRPr lang="en-US"/>
+          </a:p>
+        </p:txBody>
       </p:sp>
       <p:sp>
         <p:nvSpPr>
@@ -3355,6 +2966,13 @@
             <a:prstDash val="solid"/>
           </a:ln>
         </p:spPr>
+        <p:txBody>
+          <a:bodyPr/>
+          <a:lstStyle/>
+          <a:p>
+            <a:endParaRPr lang="en-US"/>
+          </a:p>
+        </p:txBody>
       </p:sp>
       <p:sp>
         <p:nvSpPr>
@@ -3377,7 +2995,7 @@
           <a:bodyPr wrap="square" rtlCol="0" anchor="ctr"/>
           <a:lstStyle/>
           <a:p>
-            <a:pPr indent="0" marL="0">
+            <a:pPr marL="0" indent="0">
               <a:buNone/>
             </a:pPr>
             <a:r>
@@ -3416,7 +3034,7 @@
           <a:bodyPr wrap="square" rtlCol="0" anchor="ctr"/>
           <a:lstStyle/>
           <a:p>
-            <a:pPr indent="0" marL="0">
+            <a:pPr marL="0" indent="0">
               <a:buNone/>
             </a:pPr>
             <a:r>
@@ -3458,6 +3076,13 @@
             <a:prstDash val="solid"/>
           </a:ln>
         </p:spPr>
+        <p:txBody>
+          <a:bodyPr/>
+          <a:lstStyle/>
+          <a:p>
+            <a:endParaRPr lang="en-US"/>
+          </a:p>
+        </p:txBody>
       </p:sp>
       <p:sp>
         <p:nvSpPr>
@@ -3483,6 +3108,13 @@
             <a:prstDash val="solid"/>
           </a:ln>
         </p:spPr>
+        <p:txBody>
+          <a:bodyPr/>
+          <a:lstStyle/>
+          <a:p>
+            <a:endParaRPr lang="en-US"/>
+          </a:p>
+        </p:txBody>
       </p:sp>
       <p:sp>
         <p:nvSpPr>
@@ -3505,7 +3137,7 @@
           <a:bodyPr wrap="square" rtlCol="0" anchor="ctr"/>
           <a:lstStyle/>
           <a:p>
-            <a:pPr indent="0" marL="0">
+            <a:pPr marL="0" indent="0">
               <a:buNone/>
             </a:pPr>
             <a:r>
@@ -3544,7 +3176,7 @@
           <a:bodyPr wrap="square" rtlCol="0" anchor="ctr"/>
           <a:lstStyle/>
           <a:p>
-            <a:pPr indent="0" marL="0">
+            <a:pPr marL="0" indent="0">
               <a:buNone/>
             </a:pPr>
             <a:r>
@@ -3586,6 +3218,13 @@
             <a:prstDash val="solid"/>
           </a:ln>
         </p:spPr>
+        <p:txBody>
+          <a:bodyPr/>
+          <a:lstStyle/>
+          <a:p>
+            <a:endParaRPr lang="en-US"/>
+          </a:p>
+        </p:txBody>
       </p:sp>
       <p:sp>
         <p:nvSpPr>
@@ -3611,6 +3250,13 @@
             <a:prstDash val="solid"/>
           </a:ln>
         </p:spPr>
+        <p:txBody>
+          <a:bodyPr/>
+          <a:lstStyle/>
+          <a:p>
+            <a:endParaRPr lang="en-US"/>
+          </a:p>
+        </p:txBody>
       </p:sp>
       <p:sp>
         <p:nvSpPr>
@@ -3633,7 +3279,7 @@
           <a:bodyPr wrap="square" rtlCol="0" anchor="ctr"/>
           <a:lstStyle/>
           <a:p>
-            <a:pPr indent="0" marL="0">
+            <a:pPr marL="0" indent="0">
               <a:buNone/>
             </a:pPr>
             <a:r>
@@ -3672,7 +3318,7 @@
           <a:bodyPr wrap="square" rtlCol="0" anchor="ctr"/>
           <a:lstStyle/>
           <a:p>
-            <a:pPr indent="0" marL="0">
+            <a:pPr marL="0" indent="0">
               <a:buNone/>
             </a:pPr>
             <a:r>
@@ -3714,6 +3360,13 @@
             <a:prstDash val="solid"/>
           </a:ln>
         </p:spPr>
+        <p:txBody>
+          <a:bodyPr/>
+          <a:lstStyle/>
+          <a:p>
+            <a:endParaRPr lang="en-US"/>
+          </a:p>
+        </p:txBody>
       </p:sp>
       <p:sp>
         <p:nvSpPr>
@@ -3739,6 +3392,13 @@
             <a:prstDash val="solid"/>
           </a:ln>
         </p:spPr>
+        <p:txBody>
+          <a:bodyPr/>
+          <a:lstStyle/>
+          <a:p>
+            <a:endParaRPr lang="en-US"/>
+          </a:p>
+        </p:txBody>
       </p:sp>
       <p:sp>
         <p:nvSpPr>
@@ -3761,7 +3421,7 @@
           <a:bodyPr wrap="square" rtlCol="0" anchor="ctr"/>
           <a:lstStyle/>
           <a:p>
-            <a:pPr indent="0" marL="0">
+            <a:pPr marL="0" indent="0">
               <a:buNone/>
             </a:pPr>
             <a:r>
@@ -3800,7 +3460,7 @@
           <a:bodyPr wrap="square" rtlCol="0" anchor="ctr"/>
           <a:lstStyle/>
           <a:p>
-            <a:pPr indent="0" marL="0">
+            <a:pPr marL="0" indent="0">
               <a:buNone/>
             </a:pPr>
             <a:r>
@@ -3839,7 +3499,7 @@
           <a:bodyPr wrap="square" rtlCol="0" anchor="ctr"/>
           <a:lstStyle/>
           <a:p>
-            <a:pPr indent="0" marL="0">
+            <a:pPr marL="0" indent="0">
               <a:buNone/>
             </a:pPr>
             <a:r>
@@ -3878,7 +3538,7 @@
           <a:bodyPr wrap="square" rtlCol="0" anchor="ctr"/>
           <a:lstStyle/>
           <a:p>
-            <a:pPr indent="0" marL="0">
+            <a:pPr marL="0" indent="0">
               <a:buNone/>
             </a:pPr>
             <a:r>
@@ -3917,7 +3577,7 @@
           <a:bodyPr wrap="square" rtlCol="0" anchor="ctr"/>
           <a:lstStyle/>
           <a:p>
-            <a:pPr indent="0" marL="0">
+            <a:pPr marL="0" indent="0">
               <a:buNone/>
             </a:pPr>
             <a:r>
@@ -3957,6 +3617,13 @@
             <a:prstDash val="solid"/>
           </a:ln>
         </p:spPr>
+        <p:txBody>
+          <a:bodyPr/>
+          <a:lstStyle/>
+          <a:p>
+            <a:endParaRPr lang="en-US"/>
+          </a:p>
+        </p:txBody>
       </p:sp>
       <p:sp>
         <p:nvSpPr>
@@ -3979,7 +3646,7 @@
           <a:bodyPr wrap="square" rtlCol="0" anchor="ctr"/>
           <a:lstStyle/>
           <a:p>
-            <a:pPr indent="0" marL="0">
+            <a:pPr marL="0" indent="0">
               <a:buNone/>
             </a:pPr>
             <a:r>
@@ -4018,7 +3685,7 @@
           <a:bodyPr wrap="square" rtlCol="0" anchor="ctr"/>
           <a:lstStyle/>
           <a:p>
-            <a:pPr indent="0" marL="0">
+            <a:pPr marL="0" indent="0">
               <a:buNone/>
             </a:pPr>
             <a:r>
@@ -4057,7 +3724,7 @@
           <a:bodyPr wrap="square" rtlCol="0" anchor="ctr"/>
           <a:lstStyle/>
           <a:p>
-            <a:pPr indent="0" marL="0">
+            <a:pPr marL="0" indent="0">
               <a:buNone/>
             </a:pPr>
             <a:r>
@@ -4097,6 +3764,13 @@
             <a:prstDash val="solid"/>
           </a:ln>
         </p:spPr>
+        <p:txBody>
+          <a:bodyPr/>
+          <a:lstStyle/>
+          <a:p>
+            <a:endParaRPr lang="en-US"/>
+          </a:p>
+        </p:txBody>
       </p:sp>
       <p:sp>
         <p:nvSpPr>
@@ -4119,7 +3793,7 @@
           <a:bodyPr wrap="square" rtlCol="0" anchor="ctr"/>
           <a:lstStyle/>
           <a:p>
-            <a:pPr indent="0" marL="0">
+            <a:pPr marL="0" indent="0">
               <a:buNone/>
             </a:pPr>
             <a:r>
@@ -4158,7 +3832,7 @@
           <a:bodyPr wrap="square" rtlCol="0" anchor="ctr"/>
           <a:lstStyle/>
           <a:p>
-            <a:pPr indent="0" marL="0">
+            <a:pPr marL="0" indent="0">
               <a:buNone/>
             </a:pPr>
             <a:r>
@@ -4197,7 +3871,7 @@
           <a:bodyPr wrap="square" rtlCol="0" anchor="ctr"/>
           <a:lstStyle/>
           <a:p>
-            <a:pPr indent="0" marL="0">
+            <a:pPr marL="0" indent="0">
               <a:buNone/>
             </a:pPr>
             <a:r>
@@ -4237,6 +3911,13 @@
             <a:prstDash val="solid"/>
           </a:ln>
         </p:spPr>
+        <p:txBody>
+          <a:bodyPr/>
+          <a:lstStyle/>
+          <a:p>
+            <a:endParaRPr lang="en-US"/>
+          </a:p>
+        </p:txBody>
       </p:sp>
       <p:sp>
         <p:nvSpPr>
@@ -4259,7 +3940,7 @@
           <a:bodyPr wrap="square" rtlCol="0" anchor="ctr"/>
           <a:lstStyle/>
           <a:p>
-            <a:pPr indent="0" marL="0">
+            <a:pPr marL="0" indent="0">
               <a:buNone/>
             </a:pPr>
             <a:r>
@@ -4298,7 +3979,7 @@
           <a:bodyPr wrap="square" rtlCol="0" anchor="ctr"/>
           <a:lstStyle/>
           <a:p>
-            <a:pPr indent="0" marL="0">
+            <a:pPr marL="0" indent="0">
               <a:buNone/>
             </a:pPr>
             <a:r>
@@ -4337,7 +4018,7 @@
           <a:bodyPr wrap="square" rtlCol="0" anchor="ctr"/>
           <a:lstStyle/>
           <a:p>
-            <a:pPr indent="0" marL="0">
+            <a:pPr marL="0" indent="0">
               <a:buNone/>
             </a:pPr>
             <a:r>
@@ -4377,6 +4058,13 @@
             <a:prstDash val="solid"/>
           </a:ln>
         </p:spPr>
+        <p:txBody>
+          <a:bodyPr/>
+          <a:lstStyle/>
+          <a:p>
+            <a:endParaRPr lang="en-US"/>
+          </a:p>
+        </p:txBody>
       </p:sp>
       <p:sp>
         <p:nvSpPr>
@@ -4399,7 +4087,7 @@
           <a:bodyPr wrap="square" rtlCol="0" anchor="ctr"/>
           <a:lstStyle/>
           <a:p>
-            <a:pPr indent="0" marL="0">
+            <a:pPr marL="0" indent="0">
               <a:buNone/>
             </a:pPr>
             <a:r>
@@ -4438,7 +4126,7 @@
           <a:bodyPr wrap="square" rtlCol="0" anchor="ctr"/>
           <a:lstStyle/>
           <a:p>
-            <a:pPr indent="0" marL="0">
+            <a:pPr marL="0" indent="0">
               <a:buNone/>
             </a:pPr>
             <a:r>
@@ -4477,7 +4165,7 @@
           <a:bodyPr wrap="square" rtlCol="0" anchor="ctr"/>
           <a:lstStyle/>
           <a:p>
-            <a:pPr indent="0" marL="0">
+            <a:pPr marL="0" indent="0">
               <a:buNone/>
             </a:pPr>
             <a:r>
@@ -4516,7 +4204,7 @@
           <a:bodyPr wrap="square" rtlCol="0" anchor="ctr"/>
           <a:lstStyle/>
           <a:p>
-            <a:pPr indent="0" marL="0">
+            <a:pPr marL="0" indent="0">
               <a:buNone/>
             </a:pPr>
             <a:r>
@@ -4555,7 +4243,7 @@
           <a:bodyPr wrap="square" rtlCol="0" anchor="ctr"/>
           <a:lstStyle/>
           <a:p>
-            <a:pPr algn="r" indent="0" marL="0">
+            <a:pPr marL="0" indent="0" algn="r">
               <a:buNone/>
             </a:pPr>
             <a:r>
@@ -4589,6 +4277,7 @@
         <a:solidFill>
           <a:srgbClr val="FFFFFF"/>
         </a:solidFill>
+        <a:effectLst/>
       </p:bgPr>
     </p:bg>
     <p:spTree>
@@ -4626,11 +4315,11 @@
           <a:bodyPr wrap="square" rtlCol="0" anchor="ctr"/>
           <a:lstStyle/>
           <a:p>
-            <a:pPr indent="0" marL="0">
-              <a:buNone/>
-            </a:pPr>
-            <a:r>
-              <a:rPr lang="en-US" sz="1000" b="1" spc="400" kern="0" dirty="0">
+            <a:pPr marL="0" indent="0">
+              <a:buNone/>
+            </a:pPr>
+            <a:r>
+              <a:rPr lang="en-US" sz="1000" b="1" kern="0" spc="400" dirty="0">
                 <a:solidFill>
                   <a:srgbClr val="F2B340"/>
                 </a:solidFill>
@@ -4665,7 +4354,7 @@
           <a:bodyPr wrap="square" rtlCol="0" anchor="ctr"/>
           <a:lstStyle/>
           <a:p>
-            <a:pPr indent="0" marL="0">
+            <a:pPr marL="0" indent="0">
               <a:buNone/>
             </a:pPr>
             <a:r>
@@ -4704,11 +4393,11 @@
           <a:bodyPr wrap="square" rtlCol="0" anchor="ctr"/>
           <a:lstStyle/>
           <a:p>
-            <a:pPr indent="0" marL="0">
-              <a:buNone/>
-            </a:pPr>
-            <a:r>
-              <a:rPr lang="en-US" sz="900" spc="200" kern="0" dirty="0">
+            <a:pPr marL="0" indent="0">
+              <a:buNone/>
+            </a:pPr>
+            <a:r>
+              <a:rPr lang="en-US" sz="900" kern="0" spc="200" dirty="0">
                 <a:solidFill>
                   <a:srgbClr val="8A93B8"/>
                 </a:solidFill>
@@ -4743,7 +4432,7 @@
           <a:bodyPr wrap="square" rtlCol="0" anchor="ctr"/>
           <a:lstStyle/>
           <a:p>
-            <a:pPr indent="0" marL="0">
+            <a:pPr marL="0" indent="0">
               <a:buNone/>
             </a:pPr>
             <a:r>
@@ -4782,11 +4471,11 @@
           <a:bodyPr wrap="square" rtlCol="0" anchor="ctr"/>
           <a:lstStyle/>
           <a:p>
-            <a:pPr indent="0" marL="0">
-              <a:buNone/>
-            </a:pPr>
-            <a:r>
-              <a:rPr lang="en-US" sz="900" spc="200" kern="0" dirty="0">
+            <a:pPr marL="0" indent="0">
+              <a:buNone/>
+            </a:pPr>
+            <a:r>
+              <a:rPr lang="en-US" sz="900" kern="0" spc="200" dirty="0">
                 <a:solidFill>
                   <a:srgbClr val="8A93B8"/>
                 </a:solidFill>
@@ -4821,7 +4510,7 @@
           <a:bodyPr wrap="square" rtlCol="0" anchor="ctr"/>
           <a:lstStyle/>
           <a:p>
-            <a:pPr indent="0" marL="0">
+            <a:pPr marL="0" indent="0">
               <a:buNone/>
             </a:pPr>
             <a:r>
@@ -4860,11 +4549,11 @@
           <a:bodyPr wrap="square" rtlCol="0" anchor="ctr"/>
           <a:lstStyle/>
           <a:p>
-            <a:pPr indent="0" marL="0">
-              <a:buNone/>
-            </a:pPr>
-            <a:r>
-              <a:rPr lang="en-US" sz="900" spc="200" kern="0" dirty="0">
+            <a:pPr marL="0" indent="0">
+              <a:buNone/>
+            </a:pPr>
+            <a:r>
+              <a:rPr lang="en-US" sz="900" kern="0" spc="200" dirty="0">
                 <a:solidFill>
                   <a:srgbClr val="8A93B8"/>
                 </a:solidFill>
@@ -4899,7 +4588,7 @@
           <a:bodyPr wrap="square" rtlCol="0" anchor="ctr"/>
           <a:lstStyle/>
           <a:p>
-            <a:pPr indent="0" marL="0">
+            <a:pPr marL="0" indent="0">
               <a:buNone/>
             </a:pPr>
             <a:r>
@@ -4938,11 +4627,11 @@
           <a:bodyPr wrap="square" rtlCol="0" anchor="ctr"/>
           <a:lstStyle/>
           <a:p>
-            <a:pPr indent="0" marL="0">
-              <a:buNone/>
-            </a:pPr>
-            <a:r>
-              <a:rPr lang="en-US" sz="900" spc="200" kern="0" dirty="0">
+            <a:pPr marL="0" indent="0">
+              <a:buNone/>
+            </a:pPr>
+            <a:r>
+              <a:rPr lang="en-US" sz="900" kern="0" spc="200" dirty="0">
                 <a:solidFill>
                   <a:srgbClr val="8A93B8"/>
                 </a:solidFill>
@@ -4977,7 +4666,7 @@
           <a:bodyPr wrap="square" rtlCol="0" anchor="ctr"/>
           <a:lstStyle/>
           <a:p>
-            <a:pPr indent="0" marL="0">
+            <a:pPr marL="0" indent="0">
               <a:buNone/>
             </a:pPr>
             <a:r>
@@ -4997,7 +4686,7 @@
       </p:sp>
       <p:graphicFrame>
         <p:nvGraphicFramePr>
-          <p:cNvPr id="12" name="Chart 0" descr=""/>
+          <p:cNvPr id="12" name="Chart 0"/>
           <p:cNvGraphicFramePr/>
           <p:nvPr/>
         </p:nvGraphicFramePr>
@@ -5005,15 +4694,15 @@
           <a:off x="457200" y="2468880"/>
           <a:ext cx="6858000" cy="3657600"/>
         </p:xfrm>
-        <a:graphic xmlns:a="http://schemas.openxmlformats.org/drawingml/2006/main">
+        <a:graphic>
           <a:graphicData uri="http://schemas.openxmlformats.org/drawingml/2006/chart">
-            <c:chart xmlns:c="http://schemas.openxmlformats.org/drawingml/2006/chart" r:id="rId1"/>
+            <c:chart xmlns:c="http://schemas.openxmlformats.org/drawingml/2006/chart" xmlns:r="http://schemas.openxmlformats.org/officeDocument/2006/relationships" r:id="rId3"/>
           </a:graphicData>
         </a:graphic>
       </p:graphicFrame>
       <p:graphicFrame>
         <p:nvGraphicFramePr>
-          <p:cNvPr id="13" name="Chart 1" descr=""/>
+          <p:cNvPr id="13" name="Chart 1"/>
           <p:cNvGraphicFramePr/>
           <p:nvPr/>
         </p:nvGraphicFramePr>
@@ -5021,9 +4710,9 @@
           <a:off x="7498080" y="2468880"/>
           <a:ext cx="4297680" cy="3657600"/>
         </p:xfrm>
-        <a:graphic xmlns:a="http://schemas.openxmlformats.org/drawingml/2006/main">
+        <a:graphic>
           <a:graphicData uri="http://schemas.openxmlformats.org/drawingml/2006/chart">
-            <c:chart xmlns:c="http://schemas.openxmlformats.org/drawingml/2006/chart" r:id="rId2"/>
+            <c:chart xmlns:c="http://schemas.openxmlformats.org/drawingml/2006/chart" xmlns:r="http://schemas.openxmlformats.org/officeDocument/2006/relationships" r:id="rId4"/>
           </a:graphicData>
         </a:graphic>
       </p:graphicFrame>
@@ -5048,7 +4737,7 @@
           <a:bodyPr wrap="square" rtlCol="0" anchor="ctr"/>
           <a:lstStyle/>
           <a:p>
-            <a:pPr indent="0" marL="0">
+            <a:pPr marL="0" indent="0">
               <a:buNone/>
             </a:pPr>
             <a:r>
@@ -5087,7 +4776,7 @@
           <a:bodyPr wrap="square" rtlCol="0" anchor="ctr"/>
           <a:lstStyle/>
           <a:p>
-            <a:pPr algn="r" indent="0" marL="0">
+            <a:pPr marL="0" indent="0" algn="r">
               <a:buNone/>
             </a:pPr>
             <a:r>
@@ -5121,6 +4810,7 @@
         <a:solidFill>
           <a:srgbClr val="FFFFFF"/>
         </a:solidFill>
+        <a:effectLst/>
       </p:bgPr>
     </p:bg>
     <p:spTree>
@@ -5158,11 +4848,11 @@
           <a:bodyPr wrap="square" rtlCol="0" anchor="ctr"/>
           <a:lstStyle/>
           <a:p>
-            <a:pPr indent="0" marL="0">
-              <a:buNone/>
-            </a:pPr>
-            <a:r>
-              <a:rPr lang="en-US" sz="1000" b="1" spc="400" kern="0" dirty="0">
+            <a:pPr marL="0" indent="0">
+              <a:buNone/>
+            </a:pPr>
+            <a:r>
+              <a:rPr lang="en-US" sz="1000" b="1" kern="0" spc="400" dirty="0">
                 <a:solidFill>
                   <a:srgbClr val="F2B340"/>
                 </a:solidFill>
@@ -5197,7 +4887,7 @@
           <a:bodyPr wrap="square" rtlCol="0" anchor="ctr"/>
           <a:lstStyle/>
           <a:p>
-            <a:pPr indent="0" marL="0">
+            <a:pPr marL="0" indent="0">
               <a:buNone/>
             </a:pPr>
             <a:r>
@@ -5217,7 +4907,7 @@
       </p:sp>
       <p:graphicFrame>
         <p:nvGraphicFramePr>
-          <p:cNvPr id="4" name="Chart 0" descr=""/>
+          <p:cNvPr id="4" name="Chart 0"/>
           <p:cNvGraphicFramePr/>
           <p:nvPr/>
         </p:nvGraphicFramePr>
@@ -5225,15 +4915,15 @@
           <a:off x="457200" y="1463040"/>
           <a:ext cx="5852160" cy="4754880"/>
         </p:xfrm>
-        <a:graphic xmlns:a="http://schemas.openxmlformats.org/drawingml/2006/main">
+        <a:graphic>
           <a:graphicData uri="http://schemas.openxmlformats.org/drawingml/2006/chart">
-            <c:chart xmlns:c="http://schemas.openxmlformats.org/drawingml/2006/chart" r:id="rId1"/>
+            <c:chart xmlns:c="http://schemas.openxmlformats.org/drawingml/2006/chart" xmlns:r="http://schemas.openxmlformats.org/officeDocument/2006/relationships" r:id="rId3"/>
           </a:graphicData>
         </a:graphic>
       </p:graphicFrame>
       <p:graphicFrame>
         <p:nvGraphicFramePr>
-          <p:cNvPr id="5" name="Chart 1" descr=""/>
+          <p:cNvPr id="5" name="Chart 1"/>
           <p:cNvGraphicFramePr/>
           <p:nvPr/>
         </p:nvGraphicFramePr>
@@ -5241,9 +4931,9 @@
           <a:off x="6400800" y="1463040"/>
           <a:ext cx="2926080" cy="2743200"/>
         </p:xfrm>
-        <a:graphic xmlns:a="http://schemas.openxmlformats.org/drawingml/2006/main">
+        <a:graphic>
           <a:graphicData uri="http://schemas.openxmlformats.org/drawingml/2006/chart">
-            <c:chart xmlns:c="http://schemas.openxmlformats.org/drawingml/2006/chart" r:id="rId2"/>
+            <c:chart xmlns:c="http://schemas.openxmlformats.org/drawingml/2006/chart" xmlns:r="http://schemas.openxmlformats.org/officeDocument/2006/relationships" r:id="rId4"/>
           </a:graphicData>
         </a:graphic>
       </p:graphicFrame>
@@ -5271,6 +4961,13 @@
             <a:prstDash val="solid"/>
           </a:ln>
         </p:spPr>
+        <p:txBody>
+          <a:bodyPr/>
+          <a:lstStyle/>
+          <a:p>
+            <a:endParaRPr lang="en-US"/>
+          </a:p>
+        </p:txBody>
       </p:sp>
       <p:sp>
         <p:nvSpPr>
@@ -5293,7 +4990,7 @@
           <a:bodyPr wrap="square" rtlCol="0" anchor="ctr"/>
           <a:lstStyle/>
           <a:p>
-            <a:pPr indent="0" marL="0">
+            <a:pPr marL="0" indent="0">
               <a:buNone/>
             </a:pPr>
             <a:r>
@@ -5332,7 +5029,7 @@
           <a:bodyPr wrap="square" rtlCol="0" anchor="ctr"/>
           <a:lstStyle/>
           <a:p>
-            <a:pPr indent="0" marL="0">
+            <a:pPr marL="0" indent="0">
               <a:buNone/>
             </a:pPr>
             <a:r>
@@ -5374,6 +5071,13 @@
             <a:prstDash val="solid"/>
           </a:ln>
         </p:spPr>
+        <p:txBody>
+          <a:bodyPr/>
+          <a:lstStyle/>
+          <a:p>
+            <a:endParaRPr lang="en-US"/>
+          </a:p>
+        </p:txBody>
       </p:sp>
       <p:sp>
         <p:nvSpPr>
@@ -5396,7 +5100,7 @@
           <a:bodyPr wrap="square" rtlCol="0" anchor="ctr"/>
           <a:lstStyle/>
           <a:p>
-            <a:pPr indent="0" marL="0">
+            <a:pPr marL="0" indent="0">
               <a:buNone/>
             </a:pPr>
             <a:r>
@@ -5435,7 +5139,7 @@
           <a:bodyPr wrap="square" rtlCol="0" anchor="ctr"/>
           <a:lstStyle/>
           <a:p>
-            <a:pPr indent="0" marL="0">
+            <a:pPr marL="0" indent="0">
               <a:buNone/>
             </a:pPr>
             <a:r>
@@ -5477,6 +5181,13 @@
             <a:prstDash val="solid"/>
           </a:ln>
         </p:spPr>
+        <p:txBody>
+          <a:bodyPr/>
+          <a:lstStyle/>
+          <a:p>
+            <a:endParaRPr lang="en-US"/>
+          </a:p>
+        </p:txBody>
       </p:sp>
       <p:sp>
         <p:nvSpPr>
@@ -5499,7 +5210,7 @@
           <a:bodyPr wrap="square" rtlCol="0" anchor="ctr"/>
           <a:lstStyle/>
           <a:p>
-            <a:pPr indent="0" marL="0">
+            <a:pPr marL="0" indent="0">
               <a:buNone/>
             </a:pPr>
             <a:r>
@@ -5538,7 +5249,7 @@
           <a:bodyPr wrap="square" rtlCol="0" anchor="ctr"/>
           <a:lstStyle/>
           <a:p>
-            <a:pPr indent="0" marL="0">
+            <a:pPr marL="0" indent="0">
               <a:buNone/>
             </a:pPr>
             <a:r>
@@ -5577,11 +5288,11 @@
           <a:bodyPr wrap="square" rtlCol="0" anchor="ctr"/>
           <a:lstStyle/>
           <a:p>
-            <a:pPr indent="0" marL="0">
-              <a:buNone/>
-            </a:pPr>
-            <a:r>
-              <a:rPr lang="en-US" sz="900" b="1" spc="200" kern="0" dirty="0">
+            <a:pPr marL="0" indent="0">
+              <a:buNone/>
+            </a:pPr>
+            <a:r>
+              <a:rPr lang="en-US" sz="900" b="1" kern="0" spc="200" dirty="0">
                 <a:solidFill>
                   <a:srgbClr val="F2B340"/>
                 </a:solidFill>
@@ -5616,7 +5327,7 @@
           <a:bodyPr wrap="square" rtlCol="0" anchor="ctr"/>
           <a:lstStyle/>
           <a:p>
-            <a:pPr indent="0" marL="0">
+            <a:pPr marL="0" indent="0">
               <a:buNone/>
             </a:pPr>
             <a:r>
@@ -5655,11 +5366,11 @@
           <a:bodyPr wrap="square" rtlCol="0" anchor="ctr"/>
           <a:lstStyle/>
           <a:p>
-            <a:pPr indent="0" marL="0">
-              <a:buNone/>
-            </a:pPr>
-            <a:r>
-              <a:rPr lang="en-US" sz="900" b="1" spc="200" kern="0" dirty="0">
+            <a:pPr marL="0" indent="0">
+              <a:buNone/>
+            </a:pPr>
+            <a:r>
+              <a:rPr lang="en-US" sz="900" b="1" kern="0" spc="200" dirty="0">
                 <a:solidFill>
                   <a:srgbClr val="F96167"/>
                 </a:solidFill>
@@ -5694,7 +5405,7 @@
           <a:bodyPr wrap="square" rtlCol="0" anchor="ctr"/>
           <a:lstStyle/>
           <a:p>
-            <a:pPr indent="0" marL="0">
+            <a:pPr marL="0" indent="0">
               <a:buNone/>
             </a:pPr>
             <a:r>
@@ -5733,7 +5444,7 @@
           <a:bodyPr wrap="square" rtlCol="0" anchor="ctr"/>
           <a:lstStyle/>
           <a:p>
-            <a:pPr indent="0" marL="0">
+            <a:pPr marL="0" indent="0">
               <a:buNone/>
             </a:pPr>
             <a:r>
@@ -5772,7 +5483,7 @@
           <a:bodyPr wrap="square" rtlCol="0" anchor="ctr"/>
           <a:lstStyle/>
           <a:p>
-            <a:pPr algn="r" indent="0" marL="0">
+            <a:pPr marL="0" indent="0" algn="r">
               <a:buNone/>
             </a:pPr>
             <a:r>
@@ -5800,12 +5511,73 @@
 
 <file path=ppt/slides/slide5.xml><?xml version="1.0" encoding="utf-8"?>
 <p:sld xmlns:a="http://schemas.openxmlformats.org/drawingml/2006/main" xmlns:r="http://schemas.openxmlformats.org/officeDocument/2006/relationships" xmlns:p="http://schemas.openxmlformats.org/presentationml/2006/main">
+  <p:cSld>
+    <p:spTree>
+      <p:nvGrpSpPr>
+        <p:cNvPr id="1" name=""/>
+        <p:cNvGrpSpPr/>
+        <p:nvPr/>
+      </p:nvGrpSpPr>
+      <p:grpSpPr>
+        <a:xfrm>
+          <a:off x="0" y="0"/>
+          <a:ext cx="0" cy="0"/>
+          <a:chOff x="0" y="0"/>
+          <a:chExt cx="0" cy="0"/>
+        </a:xfrm>
+      </p:grpSpPr>
+      <p:pic>
+        <p:nvPicPr>
+          <p:cNvPr id="5" name="Picture 4">
+            <a:extLst>
+              <a:ext uri="{FF2B5EF4-FFF2-40B4-BE49-F238E27FC236}">
+                <a16:creationId xmlns:a16="http://schemas.microsoft.com/office/drawing/2014/main" id="{150AB74C-BA2B-5568-FA4C-188CCEB3AB5B}"/>
+              </a:ext>
+            </a:extLst>
+          </p:cNvPr>
+          <p:cNvPicPr>
+            <a:picLocks noChangeAspect="1"/>
+          </p:cNvPicPr>
+          <p:nvPr/>
+        </p:nvPicPr>
+        <p:blipFill>
+          <a:blip r:embed="rId2"/>
+          <a:stretch>
+            <a:fillRect/>
+          </a:stretch>
+        </p:blipFill>
+        <p:spPr>
+          <a:xfrm>
+            <a:off x="0" y="34787"/>
+            <a:ext cx="11940362" cy="6823213"/>
+          </a:xfrm>
+          <a:prstGeom prst="rect">
+            <a:avLst/>
+          </a:prstGeom>
+        </p:spPr>
+      </p:pic>
+    </p:spTree>
+    <p:extLst>
+      <p:ext uri="{BB962C8B-B14F-4D97-AF65-F5344CB8AC3E}">
+        <p14:creationId xmlns:p14="http://schemas.microsoft.com/office/powerpoint/2010/main" val="2457499776"/>
+      </p:ext>
+    </p:extLst>
+  </p:cSld>
+  <p:clrMapOvr>
+    <a:masterClrMapping/>
+  </p:clrMapOvr>
+</p:sld>
+</file>
+
+<file path=ppt/slides/slide6.xml><?xml version="1.0" encoding="utf-8"?>
+<p:sld xmlns:a="http://schemas.openxmlformats.org/drawingml/2006/main" xmlns:r="http://schemas.openxmlformats.org/officeDocument/2006/relationships" xmlns:p="http://schemas.openxmlformats.org/presentationml/2006/main">
   <p:cSld name="Slide 5">
     <p:bg>
       <p:bgPr>
         <a:solidFill>
           <a:srgbClr val="1E2761"/>
         </a:solidFill>
+        <a:effectLst/>
       </p:bgPr>
     </p:bg>
     <p:spTree>
@@ -5843,11 +5615,11 @@
           <a:bodyPr wrap="square" rtlCol="0" anchor="ctr"/>
           <a:lstStyle/>
           <a:p>
-            <a:pPr indent="0" marL="0">
-              <a:buNone/>
-            </a:pPr>
-            <a:r>
-              <a:rPr lang="en-US" sz="1000" b="1" spc="400" kern="0" dirty="0">
+            <a:pPr marL="0" indent="0">
+              <a:buNone/>
+            </a:pPr>
+            <a:r>
+              <a:rPr lang="en-US" sz="1000" b="1" kern="0" spc="400" dirty="0">
                 <a:solidFill>
                   <a:srgbClr val="F2B340"/>
                 </a:solidFill>
@@ -5882,7 +5654,7 @@
           <a:bodyPr wrap="square" rtlCol="0" anchor="ctr"/>
           <a:lstStyle/>
           <a:p>
-            <a:pPr indent="0" marL="0">
+            <a:pPr marL="0" indent="0">
               <a:buNone/>
             </a:pPr>
             <a:r>
@@ -5924,6 +5696,13 @@
             <a:prstDash val="solid"/>
           </a:ln>
         </p:spPr>
+        <p:txBody>
+          <a:bodyPr/>
+          <a:lstStyle/>
+          <a:p>
+            <a:endParaRPr lang="en-US"/>
+          </a:p>
+        </p:txBody>
       </p:sp>
       <p:sp>
         <p:nvSpPr>
@@ -5949,6 +5728,13 @@
             <a:prstDash val="solid"/>
           </a:ln>
         </p:spPr>
+        <p:txBody>
+          <a:bodyPr/>
+          <a:lstStyle/>
+          <a:p>
+            <a:endParaRPr lang="en-US"/>
+          </a:p>
+        </p:txBody>
       </p:sp>
       <p:sp>
         <p:nvSpPr>
@@ -5971,7 +5757,7 @@
           <a:bodyPr wrap="square" rtlCol="0" anchor="t"/>
           <a:lstStyle/>
           <a:p>
-            <a:pPr indent="0" marL="0">
+            <a:pPr marL="0" indent="0">
               <a:buNone/>
             </a:pPr>
             <a:r>
@@ -6098,6 +5884,13 @@
             <a:prstDash val="solid"/>
           </a:ln>
         </p:spPr>
+        <p:txBody>
+          <a:bodyPr/>
+          <a:lstStyle/>
+          <a:p>
+            <a:endParaRPr lang="en-US"/>
+          </a:p>
+        </p:txBody>
       </p:sp>
       <p:sp>
         <p:nvSpPr>
@@ -6123,6 +5916,13 @@
             <a:prstDash val="solid"/>
           </a:ln>
         </p:spPr>
+        <p:txBody>
+          <a:bodyPr/>
+          <a:lstStyle/>
+          <a:p>
+            <a:endParaRPr lang="en-US"/>
+          </a:p>
+        </p:txBody>
       </p:sp>
       <p:sp>
         <p:nvSpPr>
@@ -6145,7 +5945,7 @@
           <a:bodyPr wrap="square" rtlCol="0" anchor="t"/>
           <a:lstStyle/>
           <a:p>
-            <a:pPr indent="0" marL="0">
+            <a:pPr marL="0" indent="0">
               <a:buNone/>
             </a:pPr>
             <a:r>
@@ -6272,6 +6072,13 @@
             <a:prstDash val="solid"/>
           </a:ln>
         </p:spPr>
+        <p:txBody>
+          <a:bodyPr/>
+          <a:lstStyle/>
+          <a:p>
+            <a:endParaRPr lang="en-US"/>
+          </a:p>
+        </p:txBody>
       </p:sp>
       <p:sp>
         <p:nvSpPr>
@@ -6297,6 +6104,13 @@
             <a:prstDash val="solid"/>
           </a:ln>
         </p:spPr>
+        <p:txBody>
+          <a:bodyPr/>
+          <a:lstStyle/>
+          <a:p>
+            <a:endParaRPr lang="en-US"/>
+          </a:p>
+        </p:txBody>
       </p:sp>
       <p:sp>
         <p:nvSpPr>
@@ -6319,7 +6133,7 @@
           <a:bodyPr wrap="square" rtlCol="0" anchor="t"/>
           <a:lstStyle/>
           <a:p>
-            <a:pPr indent="0" marL="0">
+            <a:pPr marL="0" indent="0">
               <a:buNone/>
             </a:pPr>
             <a:r>
@@ -6467,6 +6281,13 @@
             <a:prstDash val="solid"/>
           </a:ln>
         </p:spPr>
+        <p:txBody>
+          <a:bodyPr/>
+          <a:lstStyle/>
+          <a:p>
+            <a:endParaRPr lang="en-US"/>
+          </a:p>
+        </p:txBody>
       </p:sp>
       <p:sp>
         <p:nvSpPr>
@@ -6489,7 +6310,7 @@
           <a:bodyPr wrap="square" rtlCol="0" anchor="ctr"/>
           <a:lstStyle/>
           <a:p>
-            <a:pPr algn="ctr" indent="0" marL="0">
+            <a:pPr marL="0" indent="0" algn="ctr">
               <a:buNone/>
             </a:pPr>
             <a:r>
@@ -6528,7 +6349,7 @@
           <a:bodyPr wrap="square" rtlCol="0" anchor="ctr"/>
           <a:lstStyle/>
           <a:p>
-            <a:pPr algn="r" indent="0" marL="0">
+            <a:pPr marL="0" indent="0" algn="r">
               <a:buNone/>
             </a:pPr>
             <a:r>
@@ -6847,4 +6668,319 @@
     </a:ext>
   </a:extLst>
 </a:theme>
+</file>
+
+<file path=ppt/theme/theme2.xml><?xml version="1.0" encoding="utf-8"?>
+<a:theme xmlns:a="http://schemas.openxmlformats.org/drawingml/2006/main" name="Office Theme">
+  <a:themeElements>
+    <a:clrScheme name="Office">
+      <a:dk1>
+        <a:sysClr val="windowText" lastClr="000000"/>
+      </a:dk1>
+      <a:lt1>
+        <a:sysClr val="window" lastClr="FFFFFF"/>
+      </a:lt1>
+      <a:dk2>
+        <a:srgbClr val="0E2841"/>
+      </a:dk2>
+      <a:lt2>
+        <a:srgbClr val="E8E8E8"/>
+      </a:lt2>
+      <a:accent1>
+        <a:srgbClr val="156082"/>
+      </a:accent1>
+      <a:accent2>
+        <a:srgbClr val="E97132"/>
+      </a:accent2>
+      <a:accent3>
+        <a:srgbClr val="196B24"/>
+      </a:accent3>
+      <a:accent4>
+        <a:srgbClr val="0F9ED5"/>
+      </a:accent4>
+      <a:accent5>
+        <a:srgbClr val="A02B93"/>
+      </a:accent5>
+      <a:accent6>
+        <a:srgbClr val="4EA72E"/>
+      </a:accent6>
+      <a:hlink>
+        <a:srgbClr val="467886"/>
+      </a:hlink>
+      <a:folHlink>
+        <a:srgbClr val="96607D"/>
+      </a:folHlink>
+    </a:clrScheme>
+    <a:fontScheme name="Office">
+      <a:majorFont>
+        <a:latin typeface="Aptos Display" panose="02110004020202020204"/>
+        <a:ea typeface=""/>
+        <a:cs typeface=""/>
+        <a:font script="Jpan" typeface="游ゴシック Light"/>
+        <a:font script="Hang" typeface="맑은 고딕"/>
+        <a:font script="Hans" typeface="等线 Light"/>
+        <a:font script="Hant" typeface="新細明體"/>
+        <a:font script="Arab" typeface="Times New Roman"/>
+        <a:font script="Hebr" typeface="Times New Roman"/>
+        <a:font script="Thai" typeface="Angsana New"/>
+        <a:font script="Ethi" typeface="Nyala"/>
+        <a:font script="Beng" typeface="Vrinda"/>
+        <a:font script="Gujr" typeface="Shruti"/>
+        <a:font script="Khmr" typeface="MoolBoran"/>
+        <a:font script="Knda" typeface="Tunga"/>
+        <a:font script="Guru" typeface="Raavi"/>
+        <a:font script="Cans" typeface="Euphemia"/>
+        <a:font script="Cher" typeface="Plantagenet Cherokee"/>
+        <a:font script="Yiii" typeface="Microsoft Yi Baiti"/>
+        <a:font script="Tibt" typeface="Microsoft Himalaya"/>
+        <a:font script="Thaa" typeface="MV Boli"/>
+        <a:font script="Deva" typeface="Mangal"/>
+        <a:font script="Telu" typeface="Gautami"/>
+        <a:font script="Taml" typeface="Latha"/>
+        <a:font script="Syrc" typeface="Estrangelo Edessa"/>
+        <a:font script="Orya" typeface="Kalinga"/>
+        <a:font script="Mlym" typeface="Kartika"/>
+        <a:font script="Laoo" typeface="DokChampa"/>
+        <a:font script="Sinh" typeface="Iskoola Pota"/>
+        <a:font script="Mong" typeface="Mongolian Baiti"/>
+        <a:font script="Viet" typeface="Times New Roman"/>
+        <a:font script="Uigh" typeface="Microsoft Uighur"/>
+        <a:font script="Geor" typeface="Sylfaen"/>
+        <a:font script="Armn" typeface="Arial"/>
+        <a:font script="Bugi" typeface="Leelawadee UI"/>
+        <a:font script="Bopo" typeface="Microsoft JhengHei"/>
+        <a:font script="Java" typeface="Javanese Text"/>
+        <a:font script="Lisu" typeface="Segoe UI"/>
+        <a:font script="Mymr" typeface="Myanmar Text"/>
+        <a:font script="Nkoo" typeface="Ebrima"/>
+        <a:font script="Olck" typeface="Nirmala UI"/>
+        <a:font script="Osma" typeface="Ebrima"/>
+        <a:font script="Phag" typeface="Phagspa"/>
+        <a:font script="Syrn" typeface="Estrangelo Edessa"/>
+        <a:font script="Syrj" typeface="Estrangelo Edessa"/>
+        <a:font script="Syre" typeface="Estrangelo Edessa"/>
+        <a:font script="Sora" typeface="Nirmala UI"/>
+        <a:font script="Tale" typeface="Microsoft Tai Le"/>
+        <a:font script="Talu" typeface="Microsoft New Tai Lue"/>
+        <a:font script="Tfng" typeface="Ebrima"/>
+      </a:majorFont>
+      <a:minorFont>
+        <a:latin typeface="Aptos" panose="02110004020202020204"/>
+        <a:ea typeface=""/>
+        <a:cs typeface=""/>
+        <a:font script="Jpan" typeface="游ゴシック"/>
+        <a:font script="Hang" typeface="맑은 고딕"/>
+        <a:font script="Hans" typeface="等线"/>
+        <a:font script="Hant" typeface="新細明體"/>
+        <a:font script="Arab" typeface="Arial"/>
+        <a:font script="Hebr" typeface="Arial"/>
+        <a:font script="Thai" typeface="Cordia New"/>
+        <a:font script="Ethi" typeface="Nyala"/>
+        <a:font script="Beng" typeface="Vrinda"/>
+        <a:font script="Gujr" typeface="Shruti"/>
+        <a:font script="Khmr" typeface="DaunPenh"/>
+        <a:font script="Knda" typeface="Tunga"/>
+        <a:font script="Guru" typeface="Raavi"/>
+        <a:font script="Cans" typeface="Euphemia"/>
+        <a:font script="Cher" typeface="Plantagenet Cherokee"/>
+        <a:font script="Yiii" typeface="Microsoft Yi Baiti"/>
+        <a:font script="Tibt" typeface="Microsoft Himalaya"/>
+        <a:font script="Thaa" typeface="MV Boli"/>
+        <a:font script="Deva" typeface="Mangal"/>
+        <a:font script="Telu" typeface="Gautami"/>
+        <a:font script="Taml" typeface="Latha"/>
+        <a:font script="Syrc" typeface="Estrangelo Edessa"/>
+        <a:font script="Orya" typeface="Kalinga"/>
+        <a:font script="Mlym" typeface="Kartika"/>
+        <a:font script="Laoo" typeface="DokChampa"/>
+        <a:font script="Sinh" typeface="Iskoola Pota"/>
+        <a:font script="Mong" typeface="Mongolian Baiti"/>
+        <a:font script="Viet" typeface="Arial"/>
+        <a:font script="Uigh" typeface="Microsoft Uighur"/>
+        <a:font script="Geor" typeface="Sylfaen"/>
+        <a:font script="Armn" typeface="Arial"/>
+        <a:font script="Bugi" typeface="Leelawadee UI"/>
+        <a:font script="Bopo" typeface="Microsoft JhengHei"/>
+        <a:font script="Java" typeface="Javanese Text"/>
+        <a:font script="Lisu" typeface="Segoe UI"/>
+        <a:font script="Mymr" typeface="Myanmar Text"/>
+        <a:font script="Nkoo" typeface="Ebrima"/>
+        <a:font script="Olck" typeface="Nirmala UI"/>
+        <a:font script="Osma" typeface="Ebrima"/>
+        <a:font script="Phag" typeface="Phagspa"/>
+        <a:font script="Syrn" typeface="Estrangelo Edessa"/>
+        <a:font script="Syrj" typeface="Estrangelo Edessa"/>
+        <a:font script="Syre" typeface="Estrangelo Edessa"/>
+        <a:font script="Sora" typeface="Nirmala UI"/>
+        <a:font script="Tale" typeface="Microsoft Tai Le"/>
+        <a:font script="Talu" typeface="Microsoft New Tai Lue"/>
+        <a:font script="Tfng" typeface="Ebrima"/>
+      </a:minorFont>
+    </a:fontScheme>
+    <a:fmtScheme name="Office">
+      <a:fillStyleLst>
+        <a:solidFill>
+          <a:schemeClr val="phClr"/>
+        </a:solidFill>
+        <a:gradFill rotWithShape="1">
+          <a:gsLst>
+            <a:gs pos="0">
+              <a:schemeClr val="phClr">
+                <a:lumMod val="110000"/>
+                <a:satMod val="105000"/>
+                <a:tint val="67000"/>
+              </a:schemeClr>
+            </a:gs>
+            <a:gs pos="50000">
+              <a:schemeClr val="phClr">
+                <a:lumMod val="105000"/>
+                <a:satMod val="103000"/>
+                <a:tint val="73000"/>
+              </a:schemeClr>
+            </a:gs>
+            <a:gs pos="100000">
+              <a:schemeClr val="phClr">
+                <a:lumMod val="105000"/>
+                <a:satMod val="109000"/>
+                <a:tint val="81000"/>
+              </a:schemeClr>
+            </a:gs>
+          </a:gsLst>
+          <a:lin ang="5400000" scaled="0"/>
+        </a:gradFill>
+        <a:gradFill rotWithShape="1">
+          <a:gsLst>
+            <a:gs pos="0">
+              <a:schemeClr val="phClr">
+                <a:satMod val="103000"/>
+                <a:lumMod val="102000"/>
+                <a:tint val="94000"/>
+              </a:schemeClr>
+            </a:gs>
+            <a:gs pos="50000">
+              <a:schemeClr val="phClr">
+                <a:satMod val="110000"/>
+                <a:lumMod val="100000"/>
+                <a:shade val="100000"/>
+              </a:schemeClr>
+            </a:gs>
+            <a:gs pos="100000">
+              <a:schemeClr val="phClr">
+                <a:lumMod val="99000"/>
+                <a:satMod val="120000"/>
+                <a:shade val="78000"/>
+              </a:schemeClr>
+            </a:gs>
+          </a:gsLst>
+          <a:lin ang="5400000" scaled="0"/>
+        </a:gradFill>
+      </a:fillStyleLst>
+      <a:lnStyleLst>
+        <a:ln w="12700" cap="flat" cmpd="sng" algn="ctr">
+          <a:solidFill>
+            <a:schemeClr val="phClr"/>
+          </a:solidFill>
+          <a:prstDash val="solid"/>
+          <a:miter lim="800000"/>
+        </a:ln>
+        <a:ln w="19050" cap="flat" cmpd="sng" algn="ctr">
+          <a:solidFill>
+            <a:schemeClr val="phClr"/>
+          </a:solidFill>
+          <a:prstDash val="solid"/>
+          <a:miter lim="800000"/>
+        </a:ln>
+        <a:ln w="25400" cap="flat" cmpd="sng" algn="ctr">
+          <a:solidFill>
+            <a:schemeClr val="phClr"/>
+          </a:solidFill>
+          <a:prstDash val="solid"/>
+          <a:miter lim="800000"/>
+        </a:ln>
+      </a:lnStyleLst>
+      <a:effectStyleLst>
+        <a:effectStyle>
+          <a:effectLst/>
+        </a:effectStyle>
+        <a:effectStyle>
+          <a:effectLst/>
+        </a:effectStyle>
+        <a:effectStyle>
+          <a:effectLst>
+            <a:outerShdw blurRad="57150" dist="19050" dir="5400000" algn="ctr" rotWithShape="0">
+              <a:srgbClr val="000000">
+                <a:alpha val="63000"/>
+              </a:srgbClr>
+            </a:outerShdw>
+          </a:effectLst>
+        </a:effectStyle>
+      </a:effectStyleLst>
+      <a:bgFillStyleLst>
+        <a:solidFill>
+          <a:schemeClr val="phClr"/>
+        </a:solidFill>
+        <a:solidFill>
+          <a:schemeClr val="phClr">
+            <a:tint val="95000"/>
+            <a:satMod val="170000"/>
+          </a:schemeClr>
+        </a:solidFill>
+        <a:gradFill rotWithShape="1">
+          <a:gsLst>
+            <a:gs pos="0">
+              <a:schemeClr val="phClr">
+                <a:tint val="93000"/>
+                <a:satMod val="150000"/>
+                <a:shade val="98000"/>
+                <a:lumMod val="102000"/>
+              </a:schemeClr>
+            </a:gs>
+            <a:gs pos="50000">
+              <a:schemeClr val="phClr">
+                <a:tint val="98000"/>
+                <a:satMod val="130000"/>
+                <a:shade val="90000"/>
+                <a:lumMod val="103000"/>
+              </a:schemeClr>
+            </a:gs>
+            <a:gs pos="100000">
+              <a:schemeClr val="phClr">
+                <a:shade val="63000"/>
+                <a:satMod val="120000"/>
+              </a:schemeClr>
+            </a:gs>
+          </a:gsLst>
+          <a:lin ang="5400000" scaled="0"/>
+        </a:gradFill>
+      </a:bgFillStyleLst>
+    </a:fmtScheme>
+  </a:themeElements>
+  <a:objectDefaults>
+    <a:lnDef>
+      <a:spPr/>
+      <a:bodyPr/>
+      <a:lstStyle/>
+      <a:style>
+        <a:lnRef idx="2">
+          <a:schemeClr val="accent1"/>
+        </a:lnRef>
+        <a:fillRef idx="0">
+          <a:schemeClr val="accent1"/>
+        </a:fillRef>
+        <a:effectRef idx="1">
+          <a:schemeClr val="accent1"/>
+        </a:effectRef>
+        <a:fontRef idx="minor">
+          <a:schemeClr val="tx1"/>
+        </a:fontRef>
+      </a:style>
+    </a:lnDef>
+  </a:objectDefaults>
+  <a:extraClrSchemeLst/>
+  <a:extLst>
+    <a:ext uri="{05A4C25C-085E-4340-85A3-A5531E510DB2}">
+      <thm15:themeFamily xmlns:thm15="http://schemas.microsoft.com/office/thememl/2012/main" name="Office Theme" id="{2E142A2C-CD16-42D6-873A-C26D2A0506FA}" vid="{1BDDFF52-6CD6-40A5-AB3C-68EB2F1E4D0A}"/>
+    </a:ext>
+  </a:extLst>
+</a:theme>
 </file>